--- a/slide/slide-2-vpc.pptx
+++ b/slide/slide-2-vpc.pptx
@@ -23,9 +23,10 @@
     <p:sldId id="271" r:id="rId17"/>
     <p:sldId id="272" r:id="rId18"/>
     <p:sldId id="273" r:id="rId19"/>
+    <p:sldId id="274" r:id="rId20"/>
   </p:sldIdLst>
   <p:notesMasterIdLst>
-    <p:notesMasterId r:id="rId20"/>
+    <p:notesMasterId r:id="rId21"/>
   </p:notesMasterIdLst>
   <p:sldSz cx="12192000" cy="6858000"/>
   <p:notesSz cx="6858000" cy="12192000"/>
@@ -1135,7 +1136,7 @@
           <a:p>
             <a:r>
               <a:rPr lang="en-US" dirty="0"/>
-              <a:t>Invece di scrivere sei subnet a mano, le calcoliamo. La funzione cidrsubnet prende il blocco del VPC, aggiunge otto bit e restituisce la barra 24 numero n: il numero n finisce nel terzo numero dell'indirizzo. Un'espressione for scorre le AZ e per ognuna calcola i tre CIDR: pubblica n, privata dieci più n, database venti più n. Il risultato è una mappa per AZ, esattamente la forma che serve a for_each. Tre variabili governano tutto: vpc_cidr, az_count e single_nat_gateway.</a:t>
+              <a:t>Secondo costrutto nuovo. Un'espressione for costruisce una lista o una mappa a partire da un'altra, applicando una formula a ogni elemento. Si legge: per ogni x nella lista, calcola questo. Se è racchiusa tra parentesi quadre produce una lista. Se è tra graffe, con la freccia uguale maggiore tra chiave e valore, produce una mappa. Con due variabili, i e x, la prima è la posizione nella lista, contando da zero. Lo usiamo nella prossima slide per calcolare tutte le subnet.</a:t>
             </a:r>
             <a:endParaRPr lang="en-US" dirty="0"/>
           </a:p>
@@ -1223,7 +1224,7 @@
           <a:p>
             <a:r>
               <a:rPr lang="en-US" dirty="0"/>
-              <a:t>L'esercizio completo è nella sezione 9 della dispensa. Si prova cidrsubnet in console, si legge il plan contando le risorse per tipo, si applica e si controllano le route table dalla CLI. Poi tre plan con l'opzione meno var, che cambia una variabile solo per quel comando: un NAT per AZ, una AZ in più, un CIDR diverso. Il terzo mostra la modifica più pericolosa: ricrea tutto. Alla fine destroy, perché il NAT si paga a ore.</a:t>
+              <a:t>Invece di scrivere sei subnet a mano, le calcoliamo. La funzione cidrsubnet prende il blocco del VPC, aggiunge otto bit e restituisce la barra 24 numero n: il numero n finisce nel terzo numero dell'indirizzo. L'espressione for che abbiamo appena visto scorre le AZ con la posizione i e per ognuna calcola i tre CIDR: pubblica i, privata dieci più i, database venti più i. Le graffe e la freccia la rendono una mappa con chiave la AZ, esattamente la forma che serve a for_each. Tre variabili governano tutto: vpc_cidr, az_count e single_nat_gateway.</a:t>
             </a:r>
             <a:endParaRPr lang="en-US" dirty="0"/>
           </a:p>
@@ -1311,7 +1312,7 @@
           <a:p>
             <a:r>
               <a:rPr lang="en-US" dirty="0"/>
-              <a:t>Riassumendo. Il materiale di studio è la dispensa 2: contiene le basi di rete, il codice completo spiegato passo per passo e l'esercizio con i risultati attesi. Oggi abbiamo visto dove il traffico può andare; la prossima volta vediamo cosa può passare: i firewall.</a:t>
+              <a:t>L'esercizio completo è nella sezione 9 della dispensa. Si prova cidrsubnet in console, si legge il plan contando le risorse per tipo, si applica e si controllano le route table dalla CLI. Poi tre plan con l'opzione meno var, che cambia una variabile solo per quel comando: un NAT per AZ, una AZ in più, un CIDR diverso. Il terzo mostra la modifica più pericolosa: ricrea tutto. Alla fine destroy, perché il NAT si paga a ore.</a:t>
             </a:r>
             <a:endParaRPr lang="en-US" dirty="0"/>
           </a:p>
@@ -1335,6 +1336,94 @@
             <a:fld id="{F7021451-1387-4CA6-816F-3879F97B5CBC}" type="slidenum">
               <a:rPr lang="en-US"/>
               <a:t>18</a:t>
+            </a:fld>
+            <a:endParaRPr lang="en-US"/>
+          </a:p>
+        </p:txBody>
+      </p:sp>
+    </p:spTree>
+    <p:extLst>
+      <p:ext uri="{BB962C8B-B14F-4D97-AF65-F5344CB8AC3E}">
+        <p14:creationId xmlns:p14="http://schemas.microsoft.com/office/powerpoint/2010/main" val="1024086991"/>
+      </p:ext>
+    </p:extLst>
+  </p:cSld>
+  <p:clrMapOvr>
+    <a:masterClrMapping/>
+  </p:clrMapOvr>
+</p:notes>
+</file>
+
+<file path=ppt/notesSlides/notesSlide19.xml><?xml version="1.0" encoding="utf-8"?>
+<p:notes xmlns:a="http://schemas.openxmlformats.org/drawingml/2006/main" xmlns:r="http://schemas.openxmlformats.org/officeDocument/2006/relationships" xmlns:p="http://schemas.openxmlformats.org/presentationml/2006/main">
+  <p:cSld>
+    <p:spTree>
+      <p:nvGrpSpPr>
+        <p:cNvPr id="1" name=""/>
+        <p:cNvGrpSpPr/>
+        <p:nvPr/>
+      </p:nvGrpSpPr>
+      <p:grpSpPr>
+        <a:xfrm>
+          <a:off x="0" y="0"/>
+          <a:ext cx="0" cy="0"/>
+          <a:chOff x="0" y="0"/>
+          <a:chExt cx="0" cy="0"/>
+        </a:xfrm>
+      </p:grpSpPr>
+      <p:sp>
+        <p:nvSpPr>
+          <p:cNvPr id="2" name="Slide Image Placeholder 1"/>
+          <p:cNvSpPr>
+            <a:spLocks noGrp="1" noRot="1" noChangeAspect="1"/>
+          </p:cNvSpPr>
+          <p:nvPr>
+            <p:ph type="sldImg"/>
+          </p:nvPr>
+        </p:nvSpPr>
+        <p:spPr/>
+      </p:sp>
+      <p:sp>
+        <p:nvSpPr>
+          <p:cNvPr id="3" name="Notes Placeholder 2"/>
+          <p:cNvSpPr>
+            <a:spLocks noGrp="1"/>
+          </p:cNvSpPr>
+          <p:nvPr>
+            <p:ph type="body" idx="1"/>
+          </p:nvPr>
+        </p:nvSpPr>
+        <p:spPr/>
+        <p:txBody>
+          <a:bodyPr/>
+          <a:lstStyle/>
+          <a:p>
+            <a:r>
+              <a:rPr lang="en-US" dirty="0"/>
+              <a:t>Riassumendo. Il materiale di studio è la dispensa 2: contiene le basi di rete, il codice completo spiegato passo per passo e l'esercizio con i risultati attesi. Oggi abbiamo visto dove il traffico può andare; la prossima volta vediamo cosa può passare: i firewall.</a:t>
+            </a:r>
+            <a:endParaRPr lang="en-US" dirty="0"/>
+          </a:p>
+        </p:txBody>
+      </p:sp>
+      <p:sp>
+        <p:nvSpPr>
+          <p:cNvPr id="4" name="Slide Number Placeholder 3"/>
+          <p:cNvSpPr>
+            <a:spLocks noGrp="1"/>
+          </p:cNvSpPr>
+          <p:nvPr>
+            <p:ph type="sldNum" sz="quarter" idx="10"/>
+          </p:nvPr>
+        </p:nvSpPr>
+        <p:spPr/>
+        <p:txBody>
+          <a:bodyPr/>
+          <a:lstStyle/>
+          <a:p>
+            <a:fld id="{F7021451-1387-4CA6-816F-3879F97B5CBC}" type="slidenum">
+              <a:rPr lang="en-US"/>
+              <a:t>19</a:t>
             </a:fld>
             <a:endParaRPr lang="en-US"/>
           </a:p>
@@ -4329,7 +4418,7 @@
               <a:buNone/>
             </a:pPr>
             <a:r>
-              <a:rPr lang="en-US" sz="1500" dirty="0">
+              <a:rPr lang="en-US" sz="1700" dirty="0">
                 <a:solidFill>
                   <a:srgbClr val="E6E6F0"/>
                 </a:solidFill>
@@ -4343,7 +4432,7 @@
               <a:buNone/>
             </a:pPr>
             <a:r>
-              <a:rPr lang="en-US" sz="1500" dirty="0">
+              <a:rPr lang="en-US" sz="1700" dirty="0">
                 <a:solidFill>
                   <a:srgbClr val="8FD694"/>
                 </a:solidFill>
@@ -4351,9 +4440,9 @@
                 <a:ea typeface="Courier New" pitchFamily="34" charset="-122"/>
                 <a:cs typeface="Courier New" pitchFamily="34" charset="-120"/>
               </a:rPr>
-              <a:t># nessun IP pubblico automatico, neanche nelle pubbliche</a:t>
-            </a:r>
-            <a:endParaRPr lang="en-US" sz="1500" dirty="0"/>
+              <a:t># mai IP pubblici automatici</a:t>
+            </a:r>
+            <a:endParaRPr lang="en-US" sz="1700" dirty="0"/>
           </a:p>
         </p:txBody>
       </p:sp>
@@ -6813,12 +6902,12 @@
         </p:nvSpPr>
         <p:spPr>
           <a:xfrm>
-            <a:off x="548640" y="1463040"/>
-            <a:ext cx="5760720" cy="3840480"/>
+            <a:off x="548640" y="1371600"/>
+            <a:ext cx="6400800" cy="3291840"/>
           </a:xfrm>
           <a:prstGeom prst="roundRect">
             <a:avLst>
-              <a:gd name="adj" fmla="val 1905"/>
+              <a:gd name="adj" fmla="val 2222"/>
             </a:avLst>
           </a:prstGeom>
           <a:solidFill>
@@ -6840,8 +6929,8 @@
         </p:nvSpPr>
         <p:spPr>
           <a:xfrm>
-            <a:off x="731520" y="1600200"/>
-            <a:ext cx="5394960" cy="3566160"/>
+            <a:off x="731520" y="1508760"/>
+            <a:ext cx="6035040" cy="3017520"/>
           </a:xfrm>
           <a:prstGeom prst="rect">
             <a:avLst/>
@@ -6857,7 +6946,7 @@
               <a:buNone/>
             </a:pPr>
             <a:r>
-              <a:rPr lang="en-US" sz="1500" dirty="0">
+              <a:rPr lang="en-US" sz="1600" dirty="0">
                 <a:solidFill>
                   <a:srgbClr val="E6E6F0"/>
                 </a:solidFill>
@@ -6867,14 +6956,14 @@
               </a:rPr>
               <a:t>resource "aws_subnet" "public" {</a:t>
             </a:r>
-            <a:endParaRPr lang="en-US" sz="1500" dirty="0"/>
+            <a:endParaRPr lang="en-US" sz="1600" dirty="0"/>
           </a:p>
           <a:p>
             <a:pPr indent="0" marL="0">
               <a:buNone/>
             </a:pPr>
             <a:r>
-              <a:rPr lang="en-US" sz="1500" dirty="0">
+              <a:rPr lang="en-US" sz="1600" dirty="0">
                 <a:solidFill>
                   <a:srgbClr val="E6E6F0"/>
                 </a:solidFill>
@@ -6884,14 +6973,14 @@
               </a:rPr>
               <a:t>  for_each = {</a:t>
             </a:r>
-            <a:endParaRPr lang="en-US" sz="1500" dirty="0"/>
+            <a:endParaRPr lang="en-US" sz="1600" dirty="0"/>
           </a:p>
           <a:p>
             <a:pPr indent="0" marL="0">
               <a:buNone/>
             </a:pPr>
             <a:r>
-              <a:rPr lang="en-US" sz="1500" dirty="0">
+              <a:rPr lang="en-US" sz="1600" dirty="0">
                 <a:solidFill>
                   <a:srgbClr val="E6E6F0"/>
                 </a:solidFill>
@@ -6901,14 +6990,14 @@
               </a:rPr>
               <a:t>    "eu-south-1a" = "10.20.0.0/24"</a:t>
             </a:r>
-            <a:endParaRPr lang="en-US" sz="1500" dirty="0"/>
+            <a:endParaRPr lang="en-US" sz="1600" dirty="0"/>
           </a:p>
           <a:p>
             <a:pPr indent="0" marL="0">
               <a:buNone/>
             </a:pPr>
             <a:r>
-              <a:rPr lang="en-US" sz="1500" dirty="0">
+              <a:rPr lang="en-US" sz="1600" dirty="0">
                 <a:solidFill>
                   <a:srgbClr val="E6E6F0"/>
                 </a:solidFill>
@@ -6918,14 +7007,14 @@
               </a:rPr>
               <a:t>    "eu-south-1b" = "10.20.1.0/24"</a:t>
             </a:r>
-            <a:endParaRPr lang="en-US" sz="1500" dirty="0"/>
+            <a:endParaRPr lang="en-US" sz="1600" dirty="0"/>
           </a:p>
           <a:p>
             <a:pPr indent="0" marL="0">
               <a:buNone/>
             </a:pPr>
             <a:r>
-              <a:rPr lang="en-US" sz="1500" dirty="0">
+              <a:rPr lang="en-US" sz="1600" dirty="0">
                 <a:solidFill>
                   <a:srgbClr val="E6E6F0"/>
                 </a:solidFill>
@@ -6935,14 +7024,14 @@
               </a:rPr>
               <a:t>  }</a:t>
             </a:r>
-            <a:endParaRPr lang="en-US" sz="1500" dirty="0"/>
+            <a:endParaRPr lang="en-US" sz="1600" dirty="0"/>
           </a:p>
           <a:p>
             <a:pPr indent="0" marL="0">
               <a:buNone/>
             </a:pPr>
             <a:r>
-              <a:rPr lang="en-US" sz="1500" dirty="0">
+              <a:rPr lang="en-US" sz="1600" dirty="0">
                 <a:solidFill>
                   <a:srgbClr val="E6E6F0"/>
                 </a:solidFill>
@@ -6952,14 +7041,14 @@
               </a:rPr>
               <a:t> </a:t>
             </a:r>
-            <a:endParaRPr lang="en-US" sz="1500" dirty="0"/>
+            <a:endParaRPr lang="en-US" sz="1600" dirty="0"/>
           </a:p>
           <a:p>
             <a:pPr indent="0" marL="0">
               <a:buNone/>
             </a:pPr>
             <a:r>
-              <a:rPr lang="en-US" sz="1500" dirty="0">
+              <a:rPr lang="en-US" sz="1600" dirty="0">
                 <a:solidFill>
                   <a:srgbClr val="E6E6F0"/>
                 </a:solidFill>
@@ -6969,14 +7058,14 @@
               </a:rPr>
               <a:t>  vpc_id            = aws_vpc.main.id</a:t>
             </a:r>
-            <a:endParaRPr lang="en-US" sz="1500" dirty="0"/>
+            <a:endParaRPr lang="en-US" sz="1600" dirty="0"/>
           </a:p>
           <a:p>
             <a:pPr indent="0" marL="0">
               <a:buNone/>
             </a:pPr>
             <a:r>
-              <a:rPr lang="en-US" sz="1500" dirty="0">
+              <a:rPr lang="en-US" sz="1600" dirty="0">
                 <a:solidFill>
                   <a:srgbClr val="E6E6F0"/>
                 </a:solidFill>
@@ -6984,13 +7073,13 @@
                 <a:ea typeface="Courier New" pitchFamily="34" charset="-122"/>
                 <a:cs typeface="Courier New" pitchFamily="34" charset="-120"/>
               </a:rPr>
-              <a:t>  availability_zone = each.key     </a:t>
+              <a:t>  availability_zone = each.key  </a:t>
             </a:r>
             <a:pPr indent="0" marL="0">
               <a:buNone/>
             </a:pPr>
             <a:r>
-              <a:rPr lang="en-US" sz="1500" dirty="0">
+              <a:rPr lang="en-US" sz="1600" dirty="0">
                 <a:solidFill>
                   <a:srgbClr val="8FD694"/>
                 </a:solidFill>
@@ -6998,16 +7087,16 @@
                 <a:ea typeface="Courier New" pitchFamily="34" charset="-122"/>
                 <a:cs typeface="Courier New" pitchFamily="34" charset="-120"/>
               </a:rPr>
-              <a:t># la chiave</a:t>
-            </a:r>
-            <a:endParaRPr lang="en-US" sz="1500" dirty="0"/>
+              <a:t># chiave</a:t>
+            </a:r>
+            <a:endParaRPr lang="en-US" sz="1600" dirty="0"/>
           </a:p>
           <a:p>
             <a:pPr indent="0" marL="0">
               <a:buNone/>
             </a:pPr>
             <a:r>
-              <a:rPr lang="en-US" sz="1500" dirty="0">
+              <a:rPr lang="en-US" sz="1600" dirty="0">
                 <a:solidFill>
                   <a:srgbClr val="E6E6F0"/>
                 </a:solidFill>
@@ -7015,13 +7104,13 @@
                 <a:ea typeface="Courier New" pitchFamily="34" charset="-122"/>
                 <a:cs typeface="Courier New" pitchFamily="34" charset="-120"/>
               </a:rPr>
-              <a:t>  cidr_block        = each.value   </a:t>
+              <a:t>  cidr_block        = each.value  </a:t>
             </a:r>
             <a:pPr indent="0" marL="0">
               <a:buNone/>
             </a:pPr>
             <a:r>
-              <a:rPr lang="en-US" sz="1500" dirty="0">
+              <a:rPr lang="en-US" sz="1600" dirty="0">
                 <a:solidFill>
                   <a:srgbClr val="8FD694"/>
                 </a:solidFill>
@@ -7029,16 +7118,16 @@
                 <a:ea typeface="Courier New" pitchFamily="34" charset="-122"/>
                 <a:cs typeface="Courier New" pitchFamily="34" charset="-120"/>
               </a:rPr>
-              <a:t># il valore</a:t>
-            </a:r>
-            <a:endParaRPr lang="en-US" sz="1500" dirty="0"/>
+              <a:t># valore</a:t>
+            </a:r>
+            <a:endParaRPr lang="en-US" sz="1600" dirty="0"/>
           </a:p>
           <a:p>
             <a:pPr indent="0" marL="0">
               <a:buNone/>
             </a:pPr>
             <a:r>
-              <a:rPr lang="en-US" sz="1500" dirty="0">
+              <a:rPr lang="en-US" sz="1600" dirty="0">
                 <a:solidFill>
                   <a:srgbClr val="E6E6F0"/>
                 </a:solidFill>
@@ -7048,7 +7137,7 @@
               </a:rPr>
               <a:t>}</a:t>
             </a:r>
-            <a:endParaRPr lang="en-US" sz="1500" dirty="0"/>
+            <a:endParaRPr lang="en-US" sz="1600" dirty="0"/>
           </a:p>
         </p:txBody>
       </p:sp>
@@ -7060,8 +7149,8 @@
         </p:nvSpPr>
         <p:spPr>
           <a:xfrm>
-            <a:off x="6492240" y="1463040"/>
-            <a:ext cx="5120640" cy="411480"/>
+            <a:off x="7178040" y="1371600"/>
+            <a:ext cx="4480560" cy="411480"/>
           </a:xfrm>
           <a:prstGeom prst="rect">
             <a:avLst/>
@@ -7077,7 +7166,7 @@
               <a:buNone/>
             </a:pPr>
             <a:r>
-              <a:rPr lang="en-US" sz="1700" b="1" dirty="0">
+              <a:rPr lang="en-US" sz="1800" b="1" dirty="0">
                 <a:solidFill>
                   <a:srgbClr val="22253A"/>
                 </a:solidFill>
@@ -7087,7 +7176,205 @@
               </a:rPr>
               <a:t>Il risultato: due subnet</a:t>
             </a:r>
-            <a:endParaRPr lang="en-US" sz="1700" dirty="0"/>
+            <a:endParaRPr lang="en-US" sz="1800" dirty="0"/>
+          </a:p>
+        </p:txBody>
+      </p:sp>
+      <p:sp>
+        <p:nvSpPr>
+          <p:cNvPr id="8" name="Shape 5"/>
+          <p:cNvSpPr/>
+          <p:nvPr/>
+        </p:nvSpPr>
+        <p:spPr>
+          <a:xfrm>
+            <a:off x="7178040" y="1874520"/>
+            <a:ext cx="4462272" cy="731520"/>
+          </a:xfrm>
+          <a:prstGeom prst="roundRect">
+            <a:avLst>
+              <a:gd name="adj" fmla="val 12500"/>
+            </a:avLst>
+          </a:prstGeom>
+          <a:solidFill>
+            <a:srgbClr val="EEEAFB"/>
+          </a:solidFill>
+          <a:ln w="12700">
+            <a:solidFill>
+              <a:srgbClr val="EEEAFB"/>
+            </a:solidFill>
+            <a:prstDash val="solid"/>
+          </a:ln>
+        </p:spPr>
+      </p:sp>
+      <p:sp>
+        <p:nvSpPr>
+          <p:cNvPr id="9" name="Text 6"/>
+          <p:cNvSpPr txBox="1"/>
+          <p:nvPr/>
+        </p:nvSpPr>
+        <p:spPr>
+          <a:xfrm>
+            <a:off x="7178040" y="1874520"/>
+            <a:ext cx="4462272" cy="731520"/>
+          </a:xfrm>
+          <a:prstGeom prst="rect">
+            <a:avLst/>
+          </a:prstGeom>
+          <a:noFill/>
+          <a:ln/>
+        </p:spPr>
+        <p:txBody>
+          <a:bodyPr wrap="square" lIns="152400" tIns="152400" rIns="152400" bIns="152400" rtlCol="0" anchor="ctr"/>
+          <a:lstStyle/>
+          <a:p>
+            <a:pPr algn="l" indent="0" marL="0">
+              <a:buNone/>
+            </a:pPr>
+            <a:r>
+              <a:rPr lang="en-US" sz="1400" b="1" dirty="0">
+                <a:solidFill>
+                  <a:srgbClr val="22253A"/>
+                </a:solidFill>
+                <a:latin typeface="Courier New" pitchFamily="34" charset="0"/>
+                <a:ea typeface="Courier New" pitchFamily="34" charset="-122"/>
+                <a:cs typeface="Courier New" pitchFamily="34" charset="-120"/>
+              </a:rPr>
+              <a:t>aws_subnet.public["eu-south-1a"]</a:t>
+            </a:r>
+            <a:endParaRPr lang="en-US" sz="1400" dirty="0"/>
+          </a:p>
+        </p:txBody>
+      </p:sp>
+      <p:sp>
+        <p:nvSpPr>
+          <p:cNvPr id="10" name="Shape 7"/>
+          <p:cNvSpPr/>
+          <p:nvPr/>
+        </p:nvSpPr>
+        <p:spPr>
+          <a:xfrm>
+            <a:off x="7178040" y="2743200"/>
+            <a:ext cx="4462272" cy="731520"/>
+          </a:xfrm>
+          <a:prstGeom prst="roundRect">
+            <a:avLst>
+              <a:gd name="adj" fmla="val 12500"/>
+            </a:avLst>
+          </a:prstGeom>
+          <a:solidFill>
+            <a:srgbClr val="EEEAFB"/>
+          </a:solidFill>
+          <a:ln w="12700">
+            <a:solidFill>
+              <a:srgbClr val="EEEAFB"/>
+            </a:solidFill>
+            <a:prstDash val="solid"/>
+          </a:ln>
+        </p:spPr>
+      </p:sp>
+      <p:sp>
+        <p:nvSpPr>
+          <p:cNvPr id="11" name="Text 8"/>
+          <p:cNvSpPr txBox="1"/>
+          <p:nvPr/>
+        </p:nvSpPr>
+        <p:spPr>
+          <a:xfrm>
+            <a:off x="7178040" y="2743200"/>
+            <a:ext cx="4462272" cy="731520"/>
+          </a:xfrm>
+          <a:prstGeom prst="rect">
+            <a:avLst/>
+          </a:prstGeom>
+          <a:noFill/>
+          <a:ln/>
+        </p:spPr>
+        <p:txBody>
+          <a:bodyPr wrap="square" lIns="152400" tIns="152400" rIns="152400" bIns="152400" rtlCol="0" anchor="ctr"/>
+          <a:lstStyle/>
+          <a:p>
+            <a:pPr algn="l" indent="0" marL="0">
+              <a:buNone/>
+            </a:pPr>
+            <a:r>
+              <a:rPr lang="en-US" sz="1400" b="1" dirty="0">
+                <a:solidFill>
+                  <a:srgbClr val="22253A"/>
+                </a:solidFill>
+                <a:latin typeface="Courier New" pitchFamily="34" charset="0"/>
+                <a:ea typeface="Courier New" pitchFamily="34" charset="-122"/>
+                <a:cs typeface="Courier New" pitchFamily="34" charset="-120"/>
+              </a:rPr>
+              <a:t>aws_subnet.public["eu-south-1b"]</a:t>
+            </a:r>
+            <a:endParaRPr lang="en-US" sz="1400" dirty="0"/>
+          </a:p>
+        </p:txBody>
+      </p:sp>
+      <p:sp>
+        <p:nvSpPr>
+          <p:cNvPr id="12" name="Shape 9"/>
+          <p:cNvSpPr/>
+          <p:nvPr/>
+        </p:nvSpPr>
+        <p:spPr>
+          <a:xfrm>
+            <a:off x="7178040" y="3703320"/>
+            <a:ext cx="4462272" cy="960120"/>
+          </a:xfrm>
+          <a:prstGeom prst="roundRect">
+            <a:avLst>
+              <a:gd name="adj" fmla="val 9524"/>
+            </a:avLst>
+          </a:prstGeom>
+          <a:solidFill>
+            <a:srgbClr val="FDF0E3"/>
+          </a:solidFill>
+          <a:ln w="12700">
+            <a:solidFill>
+              <a:srgbClr val="FDF0E3"/>
+            </a:solidFill>
+            <a:prstDash val="solid"/>
+          </a:ln>
+        </p:spPr>
+      </p:sp>
+      <p:sp>
+        <p:nvSpPr>
+          <p:cNvPr id="13" name="Text 10"/>
+          <p:cNvSpPr txBox="1"/>
+          <p:nvPr/>
+        </p:nvSpPr>
+        <p:spPr>
+          <a:xfrm>
+            <a:off x="7452360" y="3703320"/>
+            <a:ext cx="3913632" cy="960120"/>
+          </a:xfrm>
+          <a:prstGeom prst="rect">
+            <a:avLst/>
+          </a:prstGeom>
+          <a:noFill/>
+          <a:ln/>
+        </p:spPr>
+        <p:txBody>
+          <a:bodyPr wrap="square" lIns="0" tIns="0" rIns="0" bIns="0" rtlCol="0" anchor="ctr"/>
+          <a:lstStyle/>
+          <a:p>
+            <a:pPr algn="l" indent="0" marL="0">
+              <a:buNone/>
+            </a:pPr>
+            <a:r>
+              <a:rPr lang="en-US" sz="1600" b="1" dirty="0">
+                <a:solidFill>
+                  <a:srgbClr val="22253A"/>
+                </a:solidFill>
+                <a:latin typeface="Calibri" pitchFamily="34" charset="0"/>
+                <a:ea typeface="Calibri" pitchFamily="34" charset="-122"/>
+                <a:cs typeface="Calibri" pitchFamily="34" charset="-120"/>
+              </a:rPr>
+              <a:t>Ogni copia ha un nome stabile (la AZ): aggiungere o togliere una AZ tocca solo quella.</a:t>
+            </a:r>
+            <a:endParaRPr lang="en-US" sz="1600" dirty="0"/>
           </a:p>
         </p:txBody>
       </p:sp>
@@ -7106,18 +7393,19 @@
           </p:nvPr>
         </p:nvGraphicFramePr>
         <p:xfrm>
-          <a:off x="6492240" y="1920240"/>
-          <a:ext cx="5148072" cy="914400"/>
+          <a:off x="548640" y="4846320"/>
+          <a:ext cx="11094415" cy="914400"/>
         </p:xfrm>
         <a:graphic>
           <a:graphicData uri="http://schemas.openxmlformats.org/drawingml/2006/table">
             <a:tbl>
               <a:tblPr/>
               <a:tblGrid>
-                <a:gridCol w="3566160"/>
-                <a:gridCol w="1581912"/>
+                <a:gridCol w="2743200"/>
+                <a:gridCol w="4023360"/>
+                <a:gridCol w="4325112"/>
               </a:tblGrid>
-              <a:tr h="548640">
+              <a:tr h="438912">
                 <a:tc>
                   <a:txBody>
                     <a:bodyPr/>
@@ -7127,7 +7415,7 @@
                         <a:buNone/>
                       </a:pPr>
                       <a:r>
-                        <a:rPr lang="en-US" sz="1400" b="1" dirty="0">
+                        <a:rPr lang="en-US" sz="1600" b="1" dirty="0">
                           <a:solidFill>
                             <a:srgbClr val="FFFFFF"/>
                           </a:solidFill>
@@ -7135,9 +7423,9 @@
                           <a:ea typeface="Calibri" pitchFamily="34" charset="-122"/>
                           <a:cs typeface="Calibri" pitchFamily="34" charset="-120"/>
                         </a:rPr>
-                        <a:t>Indirizzo in Terraform</a:t>
+                        <a:t>Dentro il blocco</a:t>
                       </a:r>
-                      <a:endParaRPr lang="en-US" sz="1400" dirty="0">
+                      <a:endParaRPr lang="en-US" sz="1600" dirty="0">
                         <a:latin typeface="Calibri" charset="0"/>
                         <a:ea typeface="Calibri" charset="0"/>
                         <a:cs typeface="Calibri" charset="0"/>
@@ -7195,7 +7483,7 @@
                         <a:buNone/>
                       </a:pPr>
                       <a:r>
-                        <a:rPr lang="en-US" sz="1400" b="1" dirty="0">
+                        <a:rPr lang="en-US" sz="1600" b="1" dirty="0">
                           <a:solidFill>
                             <a:srgbClr val="FFFFFF"/>
                           </a:solidFill>
@@ -7203,9 +7491,9 @@
                           <a:ea typeface="Calibri" pitchFamily="34" charset="-122"/>
                           <a:cs typeface="Calibri" pitchFamily="34" charset="-120"/>
                         </a:rPr>
-                        <a:t>each.key</a:t>
+                        <a:t>Vale</a:t>
                       </a:r>
-                      <a:endParaRPr lang="en-US" sz="1400" dirty="0">
+                      <a:endParaRPr lang="en-US" sz="1600" dirty="0">
                         <a:latin typeface="Calibri" charset="0"/>
                         <a:ea typeface="Calibri" charset="0"/>
                         <a:cs typeface="Calibri" charset="0"/>
@@ -7254,8 +7542,6 @@
                     </a:solidFill>
                   </a:tcPr>
                 </a:tc>
-              </a:tr>
-              <a:tr h="548640">
                 <a:tc>
                   <a:txBody>
                     <a:bodyPr/>
@@ -7265,7 +7551,77 @@
                         <a:buNone/>
                       </a:pPr>
                       <a:r>
-                        <a:rPr lang="en-US" sz="1300" dirty="0">
+                        <a:rPr lang="en-US" sz="1600" b="1" dirty="0">
+                          <a:solidFill>
+                            <a:srgbClr val="FFFFFF"/>
+                          </a:solidFill>
+                          <a:latin typeface="Calibri" pitchFamily="34" charset="0"/>
+                          <a:ea typeface="Calibri" pitchFamily="34" charset="-122"/>
+                          <a:cs typeface="Calibri" pitchFamily="34" charset="-120"/>
+                        </a:rPr>
+                        <a:t>Esempio (prima copia)</a:t>
+                      </a:r>
+                      <a:endParaRPr lang="en-US" sz="1600" dirty="0">
+                        <a:latin typeface="Calibri" charset="0"/>
+                        <a:ea typeface="Calibri" charset="0"/>
+                        <a:cs typeface="Calibri" charset="0"/>
+                      </a:endParaRPr>
+                    </a:p>
+                  </a:txBody>
+                  <a:tcPr marL="73152" marR="73152" marT="73152" marB="73152" anchor="ctr">
+                    <a:lnL w="9525" cap="flat" cmpd="sng" algn="ctr">
+                      <a:solidFill>
+                        <a:srgbClr val="D9D6EC"/>
+                      </a:solidFill>
+                      <a:prstDash val="solid"/>
+                      <a:round/>
+                      <a:headEnd type="none" w="med" len="med"/>
+                      <a:tailEnd type="none" w="med" len="med"/>
+                    </a:lnL>
+                    <a:lnR w="9525" cap="flat" cmpd="sng" algn="ctr">
+                      <a:solidFill>
+                        <a:srgbClr val="D9D6EC"/>
+                      </a:solidFill>
+                      <a:prstDash val="solid"/>
+                      <a:round/>
+                      <a:headEnd type="none" w="med" len="med"/>
+                      <a:tailEnd type="none" w="med" len="med"/>
+                    </a:lnR>
+                    <a:lnT w="9525" cap="flat" cmpd="sng" algn="ctr">
+                      <a:solidFill>
+                        <a:srgbClr val="D9D6EC"/>
+                      </a:solidFill>
+                      <a:prstDash val="solid"/>
+                      <a:round/>
+                      <a:headEnd type="none" w="med" len="med"/>
+                      <a:tailEnd type="none" w="med" len="med"/>
+                    </a:lnT>
+                    <a:lnB w="9525" cap="flat" cmpd="sng" algn="ctr">
+                      <a:solidFill>
+                        <a:srgbClr val="D9D6EC"/>
+                      </a:solidFill>
+                      <a:prstDash val="solid"/>
+                      <a:round/>
+                      <a:headEnd type="none" w="med" len="med"/>
+                      <a:tailEnd type="none" w="med" len="med"/>
+                    </a:lnB>
+                    <a:solidFill>
+                      <a:srgbClr val="5B3FD0"/>
+                    </a:solidFill>
+                  </a:tcPr>
+                </a:tc>
+              </a:tr>
+              <a:tr h="438912">
+                <a:tc>
+                  <a:txBody>
+                    <a:bodyPr/>
+                    <a:lstStyle/>
+                    <a:p>
+                      <a:pPr indent="0" marL="0">
+                        <a:buNone/>
+                      </a:pPr>
+                      <a:r>
+                        <a:rPr lang="en-US" sz="1600" dirty="0">
                           <a:solidFill>
                             <a:srgbClr val="22253A"/>
                           </a:solidFill>
@@ -7273,9 +7629,9 @@
                           <a:ea typeface="Courier New" pitchFamily="34" charset="-122"/>
                           <a:cs typeface="Courier New" pitchFamily="34" charset="-120"/>
                         </a:rPr>
-                        <a:t>aws_subnet.public["eu-south-1a"]</a:t>
+                        <a:t>each.key</a:t>
                       </a:r>
-                      <a:endParaRPr lang="en-US" sz="1300" dirty="0">
+                      <a:endParaRPr lang="en-US" sz="1600" dirty="0">
                         <a:latin typeface="Courier New" charset="0"/>
                         <a:ea typeface="Courier New" charset="0"/>
                         <a:cs typeface="Courier New" charset="0"/>
@@ -7333,20 +7689,20 @@
                         <a:buNone/>
                       </a:pPr>
                       <a:r>
-                        <a:rPr lang="en-US" sz="1300" dirty="0">
+                        <a:rPr lang="en-US" sz="1600" dirty="0">
                           <a:solidFill>
                             <a:srgbClr val="22253A"/>
                           </a:solidFill>
-                          <a:latin typeface="Courier New" pitchFamily="34" charset="0"/>
-                          <a:ea typeface="Courier New" pitchFamily="34" charset="-122"/>
-                          <a:cs typeface="Courier New" pitchFamily="34" charset="-120"/>
+                          <a:latin typeface="Calibri" pitchFamily="34" charset="0"/>
+                          <a:ea typeface="Calibri" pitchFamily="34" charset="-122"/>
+                          <a:cs typeface="Calibri" pitchFamily="34" charset="-120"/>
                         </a:rPr>
-                        <a:t>eu-south-1a</a:t>
+                        <a:t>la chiave dell'elemento</a:t>
                       </a:r>
-                      <a:endParaRPr lang="en-US" sz="1300" dirty="0">
-                        <a:latin typeface="Courier New" charset="0"/>
-                        <a:ea typeface="Courier New" charset="0"/>
-                        <a:cs typeface="Courier New" charset="0"/>
+                      <a:endParaRPr lang="en-US" sz="1600" dirty="0">
+                        <a:latin typeface="Calibri" charset="0"/>
+                        <a:ea typeface="Calibri" charset="0"/>
+                        <a:cs typeface="Calibri" charset="0"/>
                       </a:endParaRPr>
                     </a:p>
                   </a:txBody>
@@ -7392,8 +7748,6 @@
                     </a:solidFill>
                   </a:tcPr>
                 </a:tc>
-              </a:tr>
-              <a:tr h="548640">
                 <a:tc>
                   <a:txBody>
                     <a:bodyPr/>
@@ -7403,7 +7757,7 @@
                         <a:buNone/>
                       </a:pPr>
                       <a:r>
-                        <a:rPr lang="en-US" sz="1300" dirty="0">
+                        <a:rPr lang="en-US" sz="1600" dirty="0">
                           <a:solidFill>
                             <a:srgbClr val="22253A"/>
                           </a:solidFill>
@@ -7411,9 +7765,79 @@
                           <a:ea typeface="Courier New" pitchFamily="34" charset="-122"/>
                           <a:cs typeface="Courier New" pitchFamily="34" charset="-120"/>
                         </a:rPr>
-                        <a:t>aws_subnet.public["eu-south-1b"]</a:t>
+                        <a:t>"eu-south-1a"</a:t>
                       </a:r>
-                      <a:endParaRPr lang="en-US" sz="1300" dirty="0">
+                      <a:endParaRPr lang="en-US" sz="1600" dirty="0">
+                        <a:latin typeface="Courier New" charset="0"/>
+                        <a:ea typeface="Courier New" charset="0"/>
+                        <a:cs typeface="Courier New" charset="0"/>
+                      </a:endParaRPr>
+                    </a:p>
+                  </a:txBody>
+                  <a:tcPr marL="73152" marR="73152" marT="73152" marB="73152" anchor="ctr">
+                    <a:lnL w="9525" cap="flat" cmpd="sng" algn="ctr">
+                      <a:solidFill>
+                        <a:srgbClr val="D9D6EC"/>
+                      </a:solidFill>
+                      <a:prstDash val="solid"/>
+                      <a:round/>
+                      <a:headEnd type="none" w="med" len="med"/>
+                      <a:tailEnd type="none" w="med" len="med"/>
+                    </a:lnL>
+                    <a:lnR w="9525" cap="flat" cmpd="sng" algn="ctr">
+                      <a:solidFill>
+                        <a:srgbClr val="D9D6EC"/>
+                      </a:solidFill>
+                      <a:prstDash val="solid"/>
+                      <a:round/>
+                      <a:headEnd type="none" w="med" len="med"/>
+                      <a:tailEnd type="none" w="med" len="med"/>
+                    </a:lnR>
+                    <a:lnT w="9525" cap="flat" cmpd="sng" algn="ctr">
+                      <a:solidFill>
+                        <a:srgbClr val="D9D6EC"/>
+                      </a:solidFill>
+                      <a:prstDash val="solid"/>
+                      <a:round/>
+                      <a:headEnd type="none" w="med" len="med"/>
+                      <a:tailEnd type="none" w="med" len="med"/>
+                    </a:lnT>
+                    <a:lnB w="9525" cap="flat" cmpd="sng" algn="ctr">
+                      <a:solidFill>
+                        <a:srgbClr val="D9D6EC"/>
+                      </a:solidFill>
+                      <a:prstDash val="solid"/>
+                      <a:round/>
+                      <a:headEnd type="none" w="med" len="med"/>
+                      <a:tailEnd type="none" w="med" len="med"/>
+                    </a:lnB>
+                    <a:solidFill>
+                      <a:srgbClr val="FFFFFF"/>
+                    </a:solidFill>
+                  </a:tcPr>
+                </a:tc>
+              </a:tr>
+              <a:tr h="438912">
+                <a:tc>
+                  <a:txBody>
+                    <a:bodyPr/>
+                    <a:lstStyle/>
+                    <a:p>
+                      <a:pPr indent="0" marL="0">
+                        <a:buNone/>
+                      </a:pPr>
+                      <a:r>
+                        <a:rPr lang="en-US" sz="1600" dirty="0">
+                          <a:solidFill>
+                            <a:srgbClr val="22253A"/>
+                          </a:solidFill>
+                          <a:latin typeface="Courier New" pitchFamily="34" charset="0"/>
+                          <a:ea typeface="Courier New" pitchFamily="34" charset="-122"/>
+                          <a:cs typeface="Courier New" pitchFamily="34" charset="-120"/>
+                        </a:rPr>
+                        <a:t>each.value</a:t>
+                      </a:r>
+                      <a:endParaRPr lang="en-US" sz="1600" dirty="0">
                         <a:latin typeface="Courier New" charset="0"/>
                         <a:ea typeface="Courier New" charset="0"/>
                         <a:cs typeface="Courier New" charset="0"/>
@@ -7471,7 +7895,75 @@
                         <a:buNone/>
                       </a:pPr>
                       <a:r>
-                        <a:rPr lang="en-US" sz="1300" dirty="0">
+                        <a:rPr lang="en-US" sz="1600" dirty="0">
+                          <a:solidFill>
+                            <a:srgbClr val="22253A"/>
+                          </a:solidFill>
+                          <a:latin typeface="Calibri" pitchFamily="34" charset="0"/>
+                          <a:ea typeface="Calibri" pitchFamily="34" charset="-122"/>
+                          <a:cs typeface="Calibri" pitchFamily="34" charset="-120"/>
+                        </a:rPr>
+                        <a:t>il valore dell'elemento</a:t>
+                      </a:r>
+                      <a:endParaRPr lang="en-US" sz="1600" dirty="0">
+                        <a:latin typeface="Calibri" charset="0"/>
+                        <a:ea typeface="Calibri" charset="0"/>
+                        <a:cs typeface="Calibri" charset="0"/>
+                      </a:endParaRPr>
+                    </a:p>
+                  </a:txBody>
+                  <a:tcPr marL="73152" marR="73152" marT="73152" marB="73152" anchor="ctr">
+                    <a:lnL w="9525" cap="flat" cmpd="sng" algn="ctr">
+                      <a:solidFill>
+                        <a:srgbClr val="D9D6EC"/>
+                      </a:solidFill>
+                      <a:prstDash val="solid"/>
+                      <a:round/>
+                      <a:headEnd type="none" w="med" len="med"/>
+                      <a:tailEnd type="none" w="med" len="med"/>
+                    </a:lnL>
+                    <a:lnR w="9525" cap="flat" cmpd="sng" algn="ctr">
+                      <a:solidFill>
+                        <a:srgbClr val="D9D6EC"/>
+                      </a:solidFill>
+                      <a:prstDash val="solid"/>
+                      <a:round/>
+                      <a:headEnd type="none" w="med" len="med"/>
+                      <a:tailEnd type="none" w="med" len="med"/>
+                    </a:lnR>
+                    <a:lnT w="9525" cap="flat" cmpd="sng" algn="ctr">
+                      <a:solidFill>
+                        <a:srgbClr val="D9D6EC"/>
+                      </a:solidFill>
+                      <a:prstDash val="solid"/>
+                      <a:round/>
+                      <a:headEnd type="none" w="med" len="med"/>
+                      <a:tailEnd type="none" w="med" len="med"/>
+                    </a:lnT>
+                    <a:lnB w="9525" cap="flat" cmpd="sng" algn="ctr">
+                      <a:solidFill>
+                        <a:srgbClr val="D9D6EC"/>
+                      </a:solidFill>
+                      <a:prstDash val="solid"/>
+                      <a:round/>
+                      <a:headEnd type="none" w="med" len="med"/>
+                      <a:tailEnd type="none" w="med" len="med"/>
+                    </a:lnB>
+                    <a:solidFill>
+                      <a:srgbClr val="F7F6FD"/>
+                    </a:solidFill>
+                  </a:tcPr>
+                </a:tc>
+                <a:tc>
+                  <a:txBody>
+                    <a:bodyPr/>
+                    <a:lstStyle/>
+                    <a:p>
+                      <a:pPr indent="0" marL="0">
+                        <a:buNone/>
+                      </a:pPr>
+                      <a:r>
+                        <a:rPr lang="en-US" sz="1600" dirty="0">
                           <a:solidFill>
                             <a:srgbClr val="22253A"/>
                           </a:solidFill>
@@ -7479,9 +7971,9 @@
                           <a:ea typeface="Courier New" pitchFamily="34" charset="-122"/>
                           <a:cs typeface="Courier New" pitchFamily="34" charset="-120"/>
                         </a:rPr>
-                        <a:t>eu-south-1b</a:t>
+                        <a:t>"10.20.0.0/24"</a:t>
                       </a:r>
-                      <a:endParaRPr lang="en-US" sz="1300" dirty="0">
+                      <a:endParaRPr lang="en-US" sz="1600" dirty="0">
                         <a:latin typeface="Courier New" charset="0"/>
                         <a:ea typeface="Courier New" charset="0"/>
                         <a:cs typeface="Courier New" charset="0"/>
@@ -7535,111 +8027,6 @@
           </a:graphicData>
         </a:graphic>
       </p:graphicFrame>
-      <p:sp>
-        <p:nvSpPr>
-          <p:cNvPr id="9" name="Shape 5"/>
-          <p:cNvSpPr/>
-          <p:nvPr/>
-        </p:nvSpPr>
-        <p:spPr>
-          <a:xfrm>
-            <a:off x="6492240" y="3840480"/>
-            <a:ext cx="5148072" cy="1463040"/>
-          </a:xfrm>
-          <a:prstGeom prst="roundRect">
-            <a:avLst>
-              <a:gd name="adj" fmla="val 6250"/>
-            </a:avLst>
-          </a:prstGeom>
-          <a:solidFill>
-            <a:srgbClr val="FDF0E3"/>
-          </a:solidFill>
-          <a:ln w="12700">
-            <a:solidFill>
-              <a:srgbClr val="FDF0E3"/>
-            </a:solidFill>
-            <a:prstDash val="solid"/>
-          </a:ln>
-        </p:spPr>
-      </p:sp>
-      <p:sp>
-        <p:nvSpPr>
-          <p:cNvPr id="10" name="Text 6"/>
-          <p:cNvSpPr txBox="1"/>
-          <p:nvPr/>
-        </p:nvSpPr>
-        <p:spPr>
-          <a:xfrm>
-            <a:off x="6766560" y="3840480"/>
-            <a:ext cx="4599432" cy="1463040"/>
-          </a:xfrm>
-          <a:prstGeom prst="rect">
-            <a:avLst/>
-          </a:prstGeom>
-          <a:noFill/>
-          <a:ln/>
-        </p:spPr>
-        <p:txBody>
-          <a:bodyPr wrap="square" lIns="0" tIns="0" rIns="0" bIns="0" rtlCol="0" anchor="ctr"/>
-          <a:lstStyle/>
-          <a:p>
-            <a:pPr algn="l" indent="0" marL="0">
-              <a:buNone/>
-            </a:pPr>
-            <a:r>
-              <a:rPr lang="en-US" sz="1700" b="1" dirty="0">
-                <a:solidFill>
-                  <a:srgbClr val="22253A"/>
-                </a:solidFill>
-                <a:latin typeface="Calibri" pitchFamily="34" charset="0"/>
-                <a:ea typeface="Calibri" pitchFamily="34" charset="-122"/>
-                <a:cs typeface="Calibri" pitchFamily="34" charset="-120"/>
-              </a:rPr>
-              <a:t>Ogni copia ha un nome stabile (la AZ): aggiungere o togliere una AZ tocca solo quella.</a:t>
-            </a:r>
-            <a:endParaRPr lang="en-US" sz="1700" dirty="0"/>
-          </a:p>
-        </p:txBody>
-      </p:sp>
-      <p:sp>
-        <p:nvSpPr>
-          <p:cNvPr id="11" name="Text 7"/>
-          <p:cNvSpPr txBox="1"/>
-          <p:nvPr/>
-        </p:nvSpPr>
-        <p:spPr>
-          <a:xfrm>
-            <a:off x="548640" y="5577840"/>
-            <a:ext cx="11094415" cy="457200"/>
-          </a:xfrm>
-          <a:prstGeom prst="rect">
-            <a:avLst/>
-          </a:prstGeom>
-          <a:noFill/>
-          <a:ln/>
-        </p:spPr>
-        <p:txBody>
-          <a:bodyPr wrap="square" lIns="0" tIns="0" rIns="0" bIns="0" rtlCol="0" anchor="ctr"/>
-          <a:lstStyle/>
-          <a:p>
-            <a:pPr algn="l" indent="0" marL="0">
-              <a:buNone/>
-            </a:pPr>
-            <a:r>
-              <a:rPr lang="en-US" sz="1500" i="1" dirty="0">
-                <a:solidFill>
-                  <a:srgbClr val="5F6478"/>
-                </a:solidFill>
-                <a:latin typeface="Calibri" pitchFamily="34" charset="0"/>
-                <a:ea typeface="Calibri" pitchFamily="34" charset="-122"/>
-                <a:cs typeface="Calibri" pitchFamily="34" charset="-120"/>
-              </a:rPr>
-              <a:t>Una copia si legge con la chiave: aws_subnet.public["eu-south-1a"].id</a:t>
-            </a:r>
-            <a:endParaRPr lang="en-US" sz="1500" dirty="0"/>
-          </a:p>
-        </p:txBody>
-      </p:sp>
       <p:sp>
         <p:nvSpPr>
           <p:cNvPr id="25" name="Slide Number Placeholder 0"/>
@@ -7753,7 +8140,7 @@
                 <a:ea typeface="Calibri" pitchFamily="34" charset="-122"/>
                 <a:cs typeface="Calibri" pitchFamily="34" charset="-120"/>
               </a:rPr>
-              <a:t>Tutta la rete da tre variabili</a:t>
+              <a:t>Le espressioni for: una formula per ogni elemento</a:t>
             </a:r>
             <a:endParaRPr lang="en-US" sz="3200" dirty="0"/>
           </a:p>
@@ -7806,12 +8193,78 @@
         </p:nvSpPr>
         <p:spPr>
           <a:xfrm>
-            <a:off x="548640" y="1463040"/>
-            <a:ext cx="6400800" cy="2560320"/>
+            <a:off x="548640" y="1325880"/>
+            <a:ext cx="11094415" cy="731520"/>
           </a:xfrm>
           <a:prstGeom prst="roundRect">
             <a:avLst>
-              <a:gd name="adj" fmla="val 2857"/>
+              <a:gd name="adj" fmla="val 12500"/>
+            </a:avLst>
+          </a:prstGeom>
+          <a:solidFill>
+            <a:srgbClr val="5B3FD0"/>
+          </a:solidFill>
+          <a:ln w="12700">
+            <a:solidFill>
+              <a:srgbClr val="5B3FD0"/>
+            </a:solidFill>
+            <a:prstDash val="solid"/>
+          </a:ln>
+        </p:spPr>
+      </p:sp>
+      <p:sp>
+        <p:nvSpPr>
+          <p:cNvPr id="6" name="Text 3"/>
+          <p:cNvSpPr txBox="1"/>
+          <p:nvPr/>
+        </p:nvSpPr>
+        <p:spPr>
+          <a:xfrm>
+            <a:off x="822960" y="1325880"/>
+            <a:ext cx="10545775" cy="731520"/>
+          </a:xfrm>
+          <a:prstGeom prst="rect">
+            <a:avLst/>
+          </a:prstGeom>
+          <a:noFill/>
+          <a:ln/>
+        </p:spPr>
+        <p:txBody>
+          <a:bodyPr wrap="square" lIns="0" tIns="0" rIns="0" bIns="0" rtlCol="0" anchor="ctr"/>
+          <a:lstStyle/>
+          <a:p>
+            <a:pPr algn="l" indent="0" marL="0">
+              <a:buNone/>
+            </a:pPr>
+            <a:r>
+              <a:rPr lang="en-US" sz="2000" b="1" dirty="0">
+                <a:solidFill>
+                  <a:srgbClr val="FFFFFF"/>
+                </a:solidFill>
+                <a:latin typeface="Calibri" pitchFamily="34" charset="0"/>
+                <a:ea typeface="Calibri" pitchFamily="34" charset="-122"/>
+                <a:cs typeface="Calibri" pitchFamily="34" charset="-120"/>
+              </a:rPr>
+              <a:t>Si legge: "per ogni x nella lista, calcola questo".</a:t>
+            </a:r>
+            <a:endParaRPr lang="en-US" sz="2000" dirty="0"/>
+          </a:p>
+        </p:txBody>
+      </p:sp>
+      <p:sp>
+        <p:nvSpPr>
+          <p:cNvPr id="7" name="Shape 4"/>
+          <p:cNvSpPr/>
+          <p:nvPr/>
+        </p:nvSpPr>
+        <p:spPr>
+          <a:xfrm>
+            <a:off x="548640" y="2286000"/>
+            <a:ext cx="5669280" cy="868680"/>
+          </a:xfrm>
+          <a:prstGeom prst="roundRect">
+            <a:avLst>
+              <a:gd name="adj" fmla="val 8421"/>
             </a:avLst>
           </a:prstGeom>
           <a:solidFill>
@@ -7827,14 +8280,14 @@
       </p:sp>
       <p:sp>
         <p:nvSpPr>
-          <p:cNvPr id="6" name="Text 3"/>
+          <p:cNvPr id="8" name="Text 5"/>
           <p:cNvSpPr txBox="1"/>
           <p:nvPr/>
         </p:nvSpPr>
         <p:spPr>
           <a:xfrm>
-            <a:off x="731520" y="1600200"/>
-            <a:ext cx="6035040" cy="2286000"/>
+            <a:off x="731520" y="2423160"/>
+            <a:ext cx="5303520" cy="594360"/>
           </a:xfrm>
           <a:prstGeom prst="rect">
             <a:avLst/>
@@ -7850,7 +8303,7 @@
               <a:buNone/>
             </a:pPr>
             <a:r>
-              <a:rPr lang="en-US" sz="1500" dirty="0">
+              <a:rPr lang="en-US" sz="1700" dirty="0">
                 <a:solidFill>
                   <a:srgbClr val="E6E6F0"/>
                 </a:solidFill>
@@ -7858,128 +8311,155 @@
                 <a:ea typeface="Courier New" pitchFamily="34" charset="-122"/>
                 <a:cs typeface="Courier New" pitchFamily="34" charset="-120"/>
               </a:rPr>
-              <a:t>subnets = {</a:t>
-            </a:r>
-            <a:endParaRPr lang="en-US" sz="1500" dirty="0"/>
-          </a:p>
-          <a:p>
-            <a:pPr indent="0" marL="0">
-              <a:buNone/>
-            </a:pPr>
-            <a:r>
-              <a:rPr lang="en-US" sz="1500" dirty="0">
-                <a:solidFill>
-                  <a:srgbClr val="E6E6F0"/>
+              <a:t>[for x in ["a", "b"] : upper(x)]</a:t>
+            </a:r>
+            <a:endParaRPr lang="en-US" sz="1700" dirty="0"/>
+          </a:p>
+        </p:txBody>
+      </p:sp>
+      <p:sp>
+        <p:nvSpPr>
+          <p:cNvPr id="9" name="Shape 6"/>
+          <p:cNvSpPr/>
+          <p:nvPr/>
+        </p:nvSpPr>
+        <p:spPr>
+          <a:xfrm>
+            <a:off x="6263640" y="2715768"/>
+            <a:ext cx="365760" cy="0"/>
+          </a:xfrm>
+          <a:prstGeom prst="line">
+            <a:avLst/>
+          </a:prstGeom>
+          <a:noFill/>
+          <a:ln w="25400">
+            <a:solidFill>
+              <a:srgbClr val="5B3FD0"/>
+            </a:solidFill>
+            <a:prstDash val="solid"/>
+            <a:tailEnd type="triangle"/>
+          </a:ln>
+        </p:spPr>
+      </p:sp>
+      <p:sp>
+        <p:nvSpPr>
+          <p:cNvPr id="10" name="Shape 7"/>
+          <p:cNvSpPr/>
+          <p:nvPr/>
+        </p:nvSpPr>
+        <p:spPr>
+          <a:xfrm>
+            <a:off x="6720840" y="2286000"/>
+            <a:ext cx="2651760" cy="868680"/>
+          </a:xfrm>
+          <a:prstGeom prst="roundRect">
+            <a:avLst>
+              <a:gd name="adj" fmla="val 10526"/>
+            </a:avLst>
+          </a:prstGeom>
+          <a:solidFill>
+            <a:srgbClr val="E5F4EC"/>
+          </a:solidFill>
+          <a:ln w="12700">
+            <a:solidFill>
+              <a:srgbClr val="E5F4EC"/>
+            </a:solidFill>
+            <a:prstDash val="solid"/>
+          </a:ln>
+        </p:spPr>
+      </p:sp>
+      <p:sp>
+        <p:nvSpPr>
+          <p:cNvPr id="11" name="Text 8"/>
+          <p:cNvSpPr txBox="1"/>
+          <p:nvPr/>
+        </p:nvSpPr>
+        <p:spPr>
+          <a:xfrm>
+            <a:off x="6720840" y="2286000"/>
+            <a:ext cx="2651760" cy="868680"/>
+          </a:xfrm>
+          <a:prstGeom prst="rect">
+            <a:avLst/>
+          </a:prstGeom>
+          <a:noFill/>
+          <a:ln/>
+        </p:spPr>
+        <p:txBody>
+          <a:bodyPr wrap="square" lIns="76200" tIns="76200" rIns="76200" bIns="76200" rtlCol="0" anchor="ctr"/>
+          <a:lstStyle/>
+          <a:p>
+            <a:pPr algn="ctr" indent="0" marL="0">
+              <a:buNone/>
+            </a:pPr>
+            <a:r>
+              <a:rPr lang="en-US" sz="1600" b="1" dirty="0">
+                <a:solidFill>
+                  <a:srgbClr val="22253A"/>
                 </a:solidFill>
                 <a:latin typeface="Courier New" pitchFamily="34" charset="0"/>
                 <a:ea typeface="Courier New" pitchFamily="34" charset="-122"/>
                 <a:cs typeface="Courier New" pitchFamily="34" charset="-120"/>
               </a:rPr>
-              <a:t>  for i, az in local.azs : az =&gt; {</a:t>
+              <a:t>["A", "B"]</a:t>
+            </a:r>
+            <a:endParaRPr lang="en-US" sz="1600" dirty="0"/>
+          </a:p>
+        </p:txBody>
+      </p:sp>
+      <p:sp>
+        <p:nvSpPr>
+          <p:cNvPr id="12" name="Text 9"/>
+          <p:cNvSpPr txBox="1"/>
+          <p:nvPr/>
+        </p:nvSpPr>
+        <p:spPr>
+          <a:xfrm>
+            <a:off x="9509760" y="2286000"/>
+            <a:ext cx="2130552" cy="868680"/>
+          </a:xfrm>
+          <a:prstGeom prst="rect">
+            <a:avLst/>
+          </a:prstGeom>
+          <a:noFill/>
+          <a:ln/>
+        </p:spPr>
+        <p:txBody>
+          <a:bodyPr wrap="square" lIns="0" tIns="0" rIns="0" bIns="0" rtlCol="0" anchor="ctr"/>
+          <a:lstStyle/>
+          <a:p>
+            <a:pPr algn="l" indent="0" marL="0">
+              <a:buNone/>
+            </a:pPr>
+            <a:r>
+              <a:rPr lang="en-US" sz="1500" b="1" dirty="0">
+                <a:solidFill>
+                  <a:srgbClr val="22253A"/>
+                </a:solidFill>
+                <a:latin typeface="Calibri" pitchFamily="34" charset="0"/>
+                <a:ea typeface="Calibri" pitchFamily="34" charset="-122"/>
+                <a:cs typeface="Calibri" pitchFamily="34" charset="-120"/>
+              </a:rPr>
+              <a:t>[ ] → produce una LISTA</a:t>
             </a:r>
             <a:endParaRPr lang="en-US" sz="1500" dirty="0"/>
           </a:p>
-          <a:p>
-            <a:pPr indent="0" marL="0">
-              <a:buNone/>
-            </a:pPr>
-            <a:r>
-              <a:rPr lang="en-US" sz="1500" dirty="0">
-                <a:solidFill>
-                  <a:srgbClr val="E6E6F0"/>
-                </a:solidFill>
-                <a:latin typeface="Courier New" pitchFamily="34" charset="0"/>
-                <a:ea typeface="Courier New" pitchFamily="34" charset="-122"/>
-                <a:cs typeface="Courier New" pitchFamily="34" charset="-120"/>
-              </a:rPr>
-              <a:t>    public  = cidrsubnet(var.vpc_cidr, 8, i)</a:t>
-            </a:r>
-            <a:endParaRPr lang="en-US" sz="1500" dirty="0"/>
-          </a:p>
-          <a:p>
-            <a:pPr indent="0" marL="0">
-              <a:buNone/>
-            </a:pPr>
-            <a:r>
-              <a:rPr lang="en-US" sz="1500" dirty="0">
-                <a:solidFill>
-                  <a:srgbClr val="E6E6F0"/>
-                </a:solidFill>
-                <a:latin typeface="Courier New" pitchFamily="34" charset="0"/>
-                <a:ea typeface="Courier New" pitchFamily="34" charset="-122"/>
-                <a:cs typeface="Courier New" pitchFamily="34" charset="-120"/>
-              </a:rPr>
-              <a:t>    private = cidrsubnet(var.vpc_cidr, 8, 10 + i)</a:t>
-            </a:r>
-            <a:endParaRPr lang="en-US" sz="1500" dirty="0"/>
-          </a:p>
-          <a:p>
-            <a:pPr indent="0" marL="0">
-              <a:buNone/>
-            </a:pPr>
-            <a:r>
-              <a:rPr lang="en-US" sz="1500" dirty="0">
-                <a:solidFill>
-                  <a:srgbClr val="E6E6F0"/>
-                </a:solidFill>
-                <a:latin typeface="Courier New" pitchFamily="34" charset="0"/>
-                <a:ea typeface="Courier New" pitchFamily="34" charset="-122"/>
-                <a:cs typeface="Courier New" pitchFamily="34" charset="-120"/>
-              </a:rPr>
-              <a:t>    db      = cidrsubnet(var.vpc_cidr, 8, 20 + i)</a:t>
-            </a:r>
-            <a:endParaRPr lang="en-US" sz="1500" dirty="0"/>
-          </a:p>
-          <a:p>
-            <a:pPr indent="0" marL="0">
-              <a:buNone/>
-            </a:pPr>
-            <a:r>
-              <a:rPr lang="en-US" sz="1500" dirty="0">
-                <a:solidFill>
-                  <a:srgbClr val="E6E6F0"/>
-                </a:solidFill>
-                <a:latin typeface="Courier New" pitchFamily="34" charset="0"/>
-                <a:ea typeface="Courier New" pitchFamily="34" charset="-122"/>
-                <a:cs typeface="Courier New" pitchFamily="34" charset="-120"/>
-              </a:rPr>
-              <a:t>  }</a:t>
-            </a:r>
-            <a:endParaRPr lang="en-US" sz="1500" dirty="0"/>
-          </a:p>
-          <a:p>
-            <a:pPr indent="0" marL="0">
-              <a:buNone/>
-            </a:pPr>
-            <a:r>
-              <a:rPr lang="en-US" sz="1500" dirty="0">
-                <a:solidFill>
-                  <a:srgbClr val="E6E6F0"/>
-                </a:solidFill>
-                <a:latin typeface="Courier New" pitchFamily="34" charset="0"/>
-                <a:ea typeface="Courier New" pitchFamily="34" charset="-122"/>
-                <a:cs typeface="Courier New" pitchFamily="34" charset="-120"/>
-              </a:rPr>
-              <a:t>}</a:t>
-            </a:r>
-            <a:endParaRPr lang="en-US" sz="1500" dirty="0"/>
-          </a:p>
-        </p:txBody>
-      </p:sp>
-      <p:sp>
-        <p:nvSpPr>
-          <p:cNvPr id="7" name="Shape 4"/>
+        </p:txBody>
+      </p:sp>
+      <p:sp>
+        <p:nvSpPr>
+          <p:cNvPr id="13" name="Shape 10"/>
           <p:cNvSpPr/>
           <p:nvPr/>
         </p:nvSpPr>
         <p:spPr>
           <a:xfrm>
-            <a:off x="7132320" y="1463040"/>
-            <a:ext cx="4507992" cy="2560320"/>
+            <a:off x="548640" y="3611880"/>
+            <a:ext cx="5669280" cy="868680"/>
           </a:xfrm>
           <a:prstGeom prst="roundRect">
             <a:avLst>
-              <a:gd name="adj" fmla="val 2857"/>
+              <a:gd name="adj" fmla="val 8421"/>
             </a:avLst>
           </a:prstGeom>
           <a:solidFill>
@@ -7995,14 +8475,14 @@
       </p:sp>
       <p:sp>
         <p:nvSpPr>
-          <p:cNvPr id="8" name="Text 5"/>
+          <p:cNvPr id="14" name="Text 11"/>
           <p:cNvSpPr txBox="1"/>
           <p:nvPr/>
         </p:nvSpPr>
         <p:spPr>
           <a:xfrm>
-            <a:off x="7315200" y="1600200"/>
-            <a:ext cx="4142232" cy="2286000"/>
+            <a:off x="731520" y="3749040"/>
+            <a:ext cx="5303520" cy="594360"/>
           </a:xfrm>
           <a:prstGeom prst="rect">
             <a:avLst/>
@@ -8018,7 +8498,7 @@
               <a:buNone/>
             </a:pPr>
             <a:r>
-              <a:rPr lang="en-US" sz="1600" dirty="0">
+              <a:rPr lang="en-US" sz="1700" dirty="0">
                 <a:solidFill>
                   <a:srgbClr val="E6E6F0"/>
                 </a:solidFill>
@@ -8026,24 +8506,786 @@
                 <a:ea typeface="Courier New" pitchFamily="34" charset="-122"/>
                 <a:cs typeface="Courier New" pitchFamily="34" charset="-120"/>
               </a:rPr>
-              <a:t>cidrsubnet("10.20.0.0/16", 8, 21)</a:t>
-            </a:r>
-            <a:endParaRPr lang="en-US" sz="1600" dirty="0"/>
-          </a:p>
-          <a:p>
-            <a:pPr indent="0" marL="0">
-              <a:buNone/>
-            </a:pPr>
-            <a:r>
-              <a:rPr lang="en-US" sz="1600" dirty="0">
-                <a:solidFill>
-                  <a:srgbClr val="8FD694"/>
+              <a:t>{for x in ["a", "b"] : x =&gt; upper(x)}</a:t>
+            </a:r>
+            <a:endParaRPr lang="en-US" sz="1700" dirty="0"/>
+          </a:p>
+        </p:txBody>
+      </p:sp>
+      <p:sp>
+        <p:nvSpPr>
+          <p:cNvPr id="15" name="Shape 12"/>
+          <p:cNvSpPr/>
+          <p:nvPr/>
+        </p:nvSpPr>
+        <p:spPr>
+          <a:xfrm>
+            <a:off x="6263640" y="4041648"/>
+            <a:ext cx="365760" cy="0"/>
+          </a:xfrm>
+          <a:prstGeom prst="line">
+            <a:avLst/>
+          </a:prstGeom>
+          <a:noFill/>
+          <a:ln w="25400">
+            <a:solidFill>
+              <a:srgbClr val="5B3FD0"/>
+            </a:solidFill>
+            <a:prstDash val="solid"/>
+            <a:tailEnd type="triangle"/>
+          </a:ln>
+        </p:spPr>
+      </p:sp>
+      <p:sp>
+        <p:nvSpPr>
+          <p:cNvPr id="16" name="Shape 13"/>
+          <p:cNvSpPr/>
+          <p:nvPr/>
+        </p:nvSpPr>
+        <p:spPr>
+          <a:xfrm>
+            <a:off x="6720840" y="3611880"/>
+            <a:ext cx="2651760" cy="868680"/>
+          </a:xfrm>
+          <a:prstGeom prst="roundRect">
+            <a:avLst>
+              <a:gd name="adj" fmla="val 10526"/>
+            </a:avLst>
+          </a:prstGeom>
+          <a:solidFill>
+            <a:srgbClr val="E5F4EC"/>
+          </a:solidFill>
+          <a:ln w="12700">
+            <a:solidFill>
+              <a:srgbClr val="E5F4EC"/>
+            </a:solidFill>
+            <a:prstDash val="solid"/>
+          </a:ln>
+        </p:spPr>
+      </p:sp>
+      <p:sp>
+        <p:nvSpPr>
+          <p:cNvPr id="17" name="Text 14"/>
+          <p:cNvSpPr txBox="1"/>
+          <p:nvPr/>
+        </p:nvSpPr>
+        <p:spPr>
+          <a:xfrm>
+            <a:off x="6720840" y="3611880"/>
+            <a:ext cx="2651760" cy="868680"/>
+          </a:xfrm>
+          <a:prstGeom prst="rect">
+            <a:avLst/>
+          </a:prstGeom>
+          <a:noFill/>
+          <a:ln/>
+        </p:spPr>
+        <p:txBody>
+          <a:bodyPr wrap="square" lIns="76200" tIns="76200" rIns="76200" bIns="76200" rtlCol="0" anchor="ctr"/>
+          <a:lstStyle/>
+          <a:p>
+            <a:pPr algn="ctr" indent="0" marL="0">
+              <a:buNone/>
+            </a:pPr>
+            <a:r>
+              <a:rPr lang="en-US" sz="1600" b="1" dirty="0">
+                <a:solidFill>
+                  <a:srgbClr val="22253A"/>
                 </a:solidFill>
                 <a:latin typeface="Courier New" pitchFamily="34" charset="0"/>
                 <a:ea typeface="Courier New" pitchFamily="34" charset="-122"/>
                 <a:cs typeface="Courier New" pitchFamily="34" charset="-120"/>
               </a:rPr>
-              <a:t># → 10.20.21.0/24</a:t>
+              <a:t>{ a = "A", b = "B" }</a:t>
+            </a:r>
+            <a:endParaRPr lang="en-US" sz="1600" dirty="0"/>
+          </a:p>
+        </p:txBody>
+      </p:sp>
+      <p:sp>
+        <p:nvSpPr>
+          <p:cNvPr id="18" name="Text 15"/>
+          <p:cNvSpPr txBox="1"/>
+          <p:nvPr/>
+        </p:nvSpPr>
+        <p:spPr>
+          <a:xfrm>
+            <a:off x="9509760" y="3611880"/>
+            <a:ext cx="2130552" cy="868680"/>
+          </a:xfrm>
+          <a:prstGeom prst="rect">
+            <a:avLst/>
+          </a:prstGeom>
+          <a:noFill/>
+          <a:ln/>
+        </p:spPr>
+        <p:txBody>
+          <a:bodyPr wrap="square" lIns="0" tIns="0" rIns="0" bIns="0" rtlCol="0" anchor="ctr"/>
+          <a:lstStyle/>
+          <a:p>
+            <a:pPr algn="l" indent="0" marL="0">
+              <a:buNone/>
+            </a:pPr>
+            <a:r>
+              <a:rPr lang="en-US" sz="1500" b="1" dirty="0">
+                <a:solidFill>
+                  <a:srgbClr val="22253A"/>
+                </a:solidFill>
+                <a:latin typeface="Calibri" pitchFamily="34" charset="0"/>
+                <a:ea typeface="Calibri" pitchFamily="34" charset="-122"/>
+                <a:cs typeface="Calibri" pitchFamily="34" charset="-120"/>
+              </a:rPr>
+              <a:t>{ } e =&gt; → una MAPPA</a:t>
+            </a:r>
+            <a:endParaRPr lang="en-US" sz="1500" dirty="0"/>
+          </a:p>
+        </p:txBody>
+      </p:sp>
+      <p:sp>
+        <p:nvSpPr>
+          <p:cNvPr id="19" name="Shape 16"/>
+          <p:cNvSpPr/>
+          <p:nvPr/>
+        </p:nvSpPr>
+        <p:spPr>
+          <a:xfrm>
+            <a:off x="548640" y="4937760"/>
+            <a:ext cx="5669280" cy="868680"/>
+          </a:xfrm>
+          <a:prstGeom prst="roundRect">
+            <a:avLst>
+              <a:gd name="adj" fmla="val 8421"/>
+            </a:avLst>
+          </a:prstGeom>
+          <a:solidFill>
+            <a:srgbClr val="1E1E2E"/>
+          </a:solidFill>
+          <a:ln w="12700">
+            <a:solidFill>
+              <a:srgbClr val="1E1E2E"/>
+            </a:solidFill>
+            <a:prstDash val="solid"/>
+          </a:ln>
+        </p:spPr>
+      </p:sp>
+      <p:sp>
+        <p:nvSpPr>
+          <p:cNvPr id="20" name="Text 17"/>
+          <p:cNvSpPr txBox="1"/>
+          <p:nvPr/>
+        </p:nvSpPr>
+        <p:spPr>
+          <a:xfrm>
+            <a:off x="731520" y="5074920"/>
+            <a:ext cx="5303520" cy="594360"/>
+          </a:xfrm>
+          <a:prstGeom prst="rect">
+            <a:avLst/>
+          </a:prstGeom>
+          <a:noFill/>
+          <a:ln/>
+        </p:spPr>
+        <p:txBody>
+          <a:bodyPr wrap="square" lIns="0" tIns="0" rIns="0" bIns="0" rtlCol="0" anchor="t"/>
+          <a:lstStyle/>
+          <a:p>
+            <a:pPr indent="0" marL="0">
+              <a:buNone/>
+            </a:pPr>
+            <a:r>
+              <a:rPr lang="en-US" sz="1700" dirty="0">
+                <a:solidFill>
+                  <a:srgbClr val="E6E6F0"/>
+                </a:solidFill>
+                <a:latin typeface="Courier New" pitchFamily="34" charset="0"/>
+                <a:ea typeface="Courier New" pitchFamily="34" charset="-122"/>
+                <a:cs typeface="Courier New" pitchFamily="34" charset="-120"/>
+              </a:rPr>
+              <a:t>[for i, x in ["a", "b"] : "${i}-${x}"]</a:t>
+            </a:r>
+            <a:endParaRPr lang="en-US" sz="1700" dirty="0"/>
+          </a:p>
+        </p:txBody>
+      </p:sp>
+      <p:sp>
+        <p:nvSpPr>
+          <p:cNvPr id="21" name="Shape 18"/>
+          <p:cNvSpPr/>
+          <p:nvPr/>
+        </p:nvSpPr>
+        <p:spPr>
+          <a:xfrm>
+            <a:off x="6263640" y="5367528"/>
+            <a:ext cx="365760" cy="0"/>
+          </a:xfrm>
+          <a:prstGeom prst="line">
+            <a:avLst/>
+          </a:prstGeom>
+          <a:noFill/>
+          <a:ln w="25400">
+            <a:solidFill>
+              <a:srgbClr val="5B3FD0"/>
+            </a:solidFill>
+            <a:prstDash val="solid"/>
+            <a:tailEnd type="triangle"/>
+          </a:ln>
+        </p:spPr>
+      </p:sp>
+      <p:sp>
+        <p:nvSpPr>
+          <p:cNvPr id="22" name="Shape 19"/>
+          <p:cNvSpPr/>
+          <p:nvPr/>
+        </p:nvSpPr>
+        <p:spPr>
+          <a:xfrm>
+            <a:off x="6720840" y="4937760"/>
+            <a:ext cx="2651760" cy="868680"/>
+          </a:xfrm>
+          <a:prstGeom prst="roundRect">
+            <a:avLst>
+              <a:gd name="adj" fmla="val 10526"/>
+            </a:avLst>
+          </a:prstGeom>
+          <a:solidFill>
+            <a:srgbClr val="E5F4EC"/>
+          </a:solidFill>
+          <a:ln w="12700">
+            <a:solidFill>
+              <a:srgbClr val="E5F4EC"/>
+            </a:solidFill>
+            <a:prstDash val="solid"/>
+          </a:ln>
+        </p:spPr>
+      </p:sp>
+      <p:sp>
+        <p:nvSpPr>
+          <p:cNvPr id="23" name="Text 20"/>
+          <p:cNvSpPr txBox="1"/>
+          <p:nvPr/>
+        </p:nvSpPr>
+        <p:spPr>
+          <a:xfrm>
+            <a:off x="6720840" y="4937760"/>
+            <a:ext cx="2651760" cy="868680"/>
+          </a:xfrm>
+          <a:prstGeom prst="rect">
+            <a:avLst/>
+          </a:prstGeom>
+          <a:noFill/>
+          <a:ln/>
+        </p:spPr>
+        <p:txBody>
+          <a:bodyPr wrap="square" lIns="76200" tIns="76200" rIns="76200" bIns="76200" rtlCol="0" anchor="ctr"/>
+          <a:lstStyle/>
+          <a:p>
+            <a:pPr algn="ctr" indent="0" marL="0">
+              <a:buNone/>
+            </a:pPr>
+            <a:r>
+              <a:rPr lang="en-US" sz="1600" b="1" dirty="0">
+                <a:solidFill>
+                  <a:srgbClr val="22253A"/>
+                </a:solidFill>
+                <a:latin typeface="Courier New" pitchFamily="34" charset="0"/>
+                <a:ea typeface="Courier New" pitchFamily="34" charset="-122"/>
+                <a:cs typeface="Courier New" pitchFamily="34" charset="-120"/>
+              </a:rPr>
+              <a:t>["0-a", "1-b"]</a:t>
+            </a:r>
+            <a:endParaRPr lang="en-US" sz="1600" dirty="0"/>
+          </a:p>
+        </p:txBody>
+      </p:sp>
+      <p:sp>
+        <p:nvSpPr>
+          <p:cNvPr id="24" name="Text 21"/>
+          <p:cNvSpPr txBox="1"/>
+          <p:nvPr/>
+        </p:nvSpPr>
+        <p:spPr>
+          <a:xfrm>
+            <a:off x="9509760" y="4937760"/>
+            <a:ext cx="2130552" cy="868680"/>
+          </a:xfrm>
+          <a:prstGeom prst="rect">
+            <a:avLst/>
+          </a:prstGeom>
+          <a:noFill/>
+          <a:ln/>
+        </p:spPr>
+        <p:txBody>
+          <a:bodyPr wrap="square" lIns="0" tIns="0" rIns="0" bIns="0" rtlCol="0" anchor="ctr"/>
+          <a:lstStyle/>
+          <a:p>
+            <a:pPr algn="l" indent="0" marL="0">
+              <a:buNone/>
+            </a:pPr>
+            <a:r>
+              <a:rPr lang="en-US" sz="1500" b="1" dirty="0">
+                <a:solidFill>
+                  <a:srgbClr val="22253A"/>
+                </a:solidFill>
+                <a:latin typeface="Calibri" pitchFamily="34" charset="0"/>
+                <a:ea typeface="Calibri" pitchFamily="34" charset="-122"/>
+                <a:cs typeface="Calibri" pitchFamily="34" charset="-120"/>
+              </a:rPr>
+              <a:t>i = la posizione (da 0)</a:t>
+            </a:r>
+            <a:endParaRPr lang="en-US" sz="1500" dirty="0"/>
+          </a:p>
+        </p:txBody>
+      </p:sp>
+      <p:sp>
+        <p:nvSpPr>
+          <p:cNvPr id="25" name="Slide Number Placeholder 0"/>
+          <p:cNvSpPr>
+            <a:spLocks noGrp="1"/>
+          </p:cNvSpPr>
+          <p:nvPr>
+            <p:ph type="sldNum" sz="quarter" idx="4294967295"/>
+          </p:nvPr>
+        </p:nvSpPr>
+        <p:spPr>
+          <a:xfrm>
+            <a:off x="11155680" y="6400800"/>
+            <a:ext cx="548640" cy="274320"/>
+          </a:xfrm>
+          <a:prstGeom prst="rect">
+            <a:avLst/>
+          </a:prstGeom>
+          <a:extLst>
+            <a:ext uri="{C572A759-6A51-4108-AA02-DFA0A04FC94B}">
+              <ma14:wrappingTextBoxFlag xmlns:ma14="http://schemas.microsoft.com/office/mac/drawingml/2011/main" val="0"/>
+            </a:ext>
+          </a:extLst>
+        </p:spPr>
+        <p:txBody>
+          <a:bodyPr/>
+          <a:lstStyle>
+            <a:lvl1pPr>
+              <a:defRPr sz="1000">
+                <a:solidFill>
+                  <a:srgbClr val="5F6478"/>
+                </a:solidFill>
+                <a:latin typeface="Calibri"/>
+                <a:ea typeface="Calibri"/>
+                <a:cs typeface="Calibri"/>
+              </a:defRPr>
+            </a:lvl1pPr>
+          </a:lstStyle>
+          <a:p>
+            <a:pPr algn="r"/>
+            <a:fld id="{F7021451-1387-4CA6-816F-3879F97B5CBC}" type="slidenum">
+              <a:rPr b="0" lang="en-US"/>
+              <a:t>16</a:t>
+            </a:fld>
+            <a:endParaRPr lang="en-US"/>
+          </a:p>
+        </p:txBody>
+      </p:sp>
+    </p:spTree>
+  </p:cSld>
+  <p:clrMapOvr>
+    <a:masterClrMapping/>
+  </p:clrMapOvr>
+</p:sld>
+</file>
+
+<file path=ppt/slides/slide17.xml><?xml version="1.0" encoding="utf-8"?>
+<p:sld xmlns:a="http://schemas.openxmlformats.org/drawingml/2006/main" xmlns:r="http://schemas.openxmlformats.org/officeDocument/2006/relationships" xmlns:p="http://schemas.openxmlformats.org/presentationml/2006/main">
+  <p:cSld name="Slide 17">
+    <p:bg>
+      <p:bgPr>
+        <a:solidFill>
+          <a:srgbClr val="FFFFFF"/>
+        </a:solidFill>
+      </p:bgPr>
+    </p:bg>
+    <p:spTree>
+      <p:nvGrpSpPr>
+        <p:cNvPr id="1" name=""/>
+        <p:cNvGrpSpPr/>
+        <p:nvPr/>
+      </p:nvGrpSpPr>
+      <p:grpSpPr>
+        <a:xfrm>
+          <a:off x="0" y="0"/>
+          <a:ext cx="0" cy="0"/>
+          <a:chOff x="0" y="0"/>
+          <a:chExt cx="0" cy="0"/>
+        </a:xfrm>
+      </p:grpSpPr>
+      <p:sp>
+        <p:nvSpPr>
+          <p:cNvPr id="2" name="Text 0"/>
+          <p:cNvSpPr txBox="1"/>
+          <p:nvPr/>
+        </p:nvSpPr>
+        <p:spPr>
+          <a:xfrm>
+            <a:off x="548640" y="365760"/>
+            <a:ext cx="11094415" cy="777240"/>
+          </a:xfrm>
+          <a:prstGeom prst="rect">
+            <a:avLst/>
+          </a:prstGeom>
+          <a:noFill/>
+          <a:ln/>
+        </p:spPr>
+        <p:txBody>
+          <a:bodyPr wrap="square" lIns="0" tIns="0" rIns="0" bIns="0" rtlCol="0" anchor="ctr"/>
+          <a:lstStyle/>
+          <a:p>
+            <a:pPr indent="0" marL="0">
+              <a:buNone/>
+            </a:pPr>
+            <a:r>
+              <a:rPr lang="en-US" sz="3200" b="1" dirty="0">
+                <a:solidFill>
+                  <a:srgbClr val="22253A"/>
+                </a:solidFill>
+                <a:latin typeface="Calibri" pitchFamily="34" charset="0"/>
+                <a:ea typeface="Calibri" pitchFamily="34" charset="-122"/>
+                <a:cs typeface="Calibri" pitchFamily="34" charset="-120"/>
+              </a:rPr>
+              <a:t>Tutta la rete da tre variabili</a:t>
+            </a:r>
+            <a:endParaRPr lang="en-US" sz="3200" dirty="0"/>
+          </a:p>
+        </p:txBody>
+      </p:sp>
+      <p:sp>
+        <p:nvSpPr>
+          <p:cNvPr id="3" name="Text 1"/>
+          <p:cNvSpPr txBox="1"/>
+          <p:nvPr/>
+        </p:nvSpPr>
+        <p:spPr>
+          <a:xfrm>
+            <a:off x="548640" y="6400800"/>
+            <a:ext cx="7315200" cy="274320"/>
+          </a:xfrm>
+          <a:prstGeom prst="rect">
+            <a:avLst/>
+          </a:prstGeom>
+          <a:noFill/>
+          <a:ln/>
+        </p:spPr>
+        <p:txBody>
+          <a:bodyPr wrap="square" lIns="0" tIns="0" rIns="0" bIns="0" rtlCol="0" anchor="ctr"/>
+          <a:lstStyle/>
+          <a:p>
+            <a:pPr indent="0" marL="0">
+              <a:buNone/>
+            </a:pPr>
+            <a:r>
+              <a:rPr lang="en-US" sz="1000" dirty="0">
+                <a:solidFill>
+                  <a:srgbClr val="5F6478"/>
+                </a:solidFill>
+                <a:latin typeface="Calibri" pitchFamily="34" charset="0"/>
+                <a:ea typeface="Calibri" pitchFamily="34" charset="-122"/>
+                <a:cs typeface="Calibri" pitchFamily="34" charset="-120"/>
+              </a:rPr>
+              <a:t>Dispensa 2 · VPC: la rete privata</a:t>
+            </a:r>
+            <a:endParaRPr lang="en-US" sz="1000" dirty="0"/>
+          </a:p>
+        </p:txBody>
+      </p:sp>
+      <p:sp>
+        <p:nvSpPr>
+          <p:cNvPr id="5" name="Shape 2"/>
+          <p:cNvSpPr/>
+          <p:nvPr/>
+        </p:nvSpPr>
+        <p:spPr>
+          <a:xfrm>
+            <a:off x="548640" y="1371600"/>
+            <a:ext cx="6949440" cy="2514600"/>
+          </a:xfrm>
+          <a:prstGeom prst="roundRect">
+            <a:avLst>
+              <a:gd name="adj" fmla="val 2909"/>
+            </a:avLst>
+          </a:prstGeom>
+          <a:solidFill>
+            <a:srgbClr val="1E1E2E"/>
+          </a:solidFill>
+          <a:ln w="12700">
+            <a:solidFill>
+              <a:srgbClr val="1E1E2E"/>
+            </a:solidFill>
+            <a:prstDash val="solid"/>
+          </a:ln>
+        </p:spPr>
+      </p:sp>
+      <p:sp>
+        <p:nvSpPr>
+          <p:cNvPr id="6" name="Text 3"/>
+          <p:cNvSpPr txBox="1"/>
+          <p:nvPr/>
+        </p:nvSpPr>
+        <p:spPr>
+          <a:xfrm>
+            <a:off x="731520" y="1508760"/>
+            <a:ext cx="6583680" cy="2240280"/>
+          </a:xfrm>
+          <a:prstGeom prst="rect">
+            <a:avLst/>
+          </a:prstGeom>
+          <a:noFill/>
+          <a:ln/>
+        </p:spPr>
+        <p:txBody>
+          <a:bodyPr wrap="square" lIns="0" tIns="0" rIns="0" bIns="0" rtlCol="0" anchor="t"/>
+          <a:lstStyle/>
+          <a:p>
+            <a:pPr indent="0" marL="0">
+              <a:buNone/>
+            </a:pPr>
+            <a:r>
+              <a:rPr lang="en-US" sz="1600" dirty="0">
+                <a:solidFill>
+                  <a:srgbClr val="E6E6F0"/>
+                </a:solidFill>
+                <a:latin typeface="Courier New" pitchFamily="34" charset="0"/>
+                <a:ea typeface="Courier New" pitchFamily="34" charset="-122"/>
+                <a:cs typeface="Courier New" pitchFamily="34" charset="-120"/>
+              </a:rPr>
+              <a:t>subnets = {</a:t>
+            </a:r>
+            <a:endParaRPr lang="en-US" sz="1600" dirty="0"/>
+          </a:p>
+          <a:p>
+            <a:pPr indent="0" marL="0">
+              <a:buNone/>
+            </a:pPr>
+            <a:r>
+              <a:rPr lang="en-US" sz="1600" dirty="0">
+                <a:solidFill>
+                  <a:srgbClr val="E6E6F0"/>
+                </a:solidFill>
+                <a:latin typeface="Courier New" pitchFamily="34" charset="0"/>
+                <a:ea typeface="Courier New" pitchFamily="34" charset="-122"/>
+                <a:cs typeface="Courier New" pitchFamily="34" charset="-120"/>
+              </a:rPr>
+              <a:t>  for i, az in local.azs : az =&gt; {</a:t>
+            </a:r>
+            <a:endParaRPr lang="en-US" sz="1600" dirty="0"/>
+          </a:p>
+          <a:p>
+            <a:pPr indent="0" marL="0">
+              <a:buNone/>
+            </a:pPr>
+            <a:r>
+              <a:rPr lang="en-US" sz="1600" dirty="0">
+                <a:solidFill>
+                  <a:srgbClr val="E6E6F0"/>
+                </a:solidFill>
+                <a:latin typeface="Courier New" pitchFamily="34" charset="0"/>
+                <a:ea typeface="Courier New" pitchFamily="34" charset="-122"/>
+                <a:cs typeface="Courier New" pitchFamily="34" charset="-120"/>
+              </a:rPr>
+              <a:t>    public  = cidrsubnet(var.vpc_cidr, 8, i)</a:t>
+            </a:r>
+            <a:endParaRPr lang="en-US" sz="1600" dirty="0"/>
+          </a:p>
+          <a:p>
+            <a:pPr indent="0" marL="0">
+              <a:buNone/>
+            </a:pPr>
+            <a:r>
+              <a:rPr lang="en-US" sz="1600" dirty="0">
+                <a:solidFill>
+                  <a:srgbClr val="E6E6F0"/>
+                </a:solidFill>
+                <a:latin typeface="Courier New" pitchFamily="34" charset="0"/>
+                <a:ea typeface="Courier New" pitchFamily="34" charset="-122"/>
+                <a:cs typeface="Courier New" pitchFamily="34" charset="-120"/>
+              </a:rPr>
+              <a:t>    private = cidrsubnet(var.vpc_cidr, 8, 10 + i)</a:t>
+            </a:r>
+            <a:endParaRPr lang="en-US" sz="1600" dirty="0"/>
+          </a:p>
+          <a:p>
+            <a:pPr indent="0" marL="0">
+              <a:buNone/>
+            </a:pPr>
+            <a:r>
+              <a:rPr lang="en-US" sz="1600" dirty="0">
+                <a:solidFill>
+                  <a:srgbClr val="E6E6F0"/>
+                </a:solidFill>
+                <a:latin typeface="Courier New" pitchFamily="34" charset="0"/>
+                <a:ea typeface="Courier New" pitchFamily="34" charset="-122"/>
+                <a:cs typeface="Courier New" pitchFamily="34" charset="-120"/>
+              </a:rPr>
+              <a:t>    db      = cidrsubnet(var.vpc_cidr, 8, 20 + i)</a:t>
+            </a:r>
+            <a:endParaRPr lang="en-US" sz="1600" dirty="0"/>
+          </a:p>
+          <a:p>
+            <a:pPr indent="0" marL="0">
+              <a:buNone/>
+            </a:pPr>
+            <a:r>
+              <a:rPr lang="en-US" sz="1600" dirty="0">
+                <a:solidFill>
+                  <a:srgbClr val="E6E6F0"/>
+                </a:solidFill>
+                <a:latin typeface="Courier New" pitchFamily="34" charset="0"/>
+                <a:ea typeface="Courier New" pitchFamily="34" charset="-122"/>
+                <a:cs typeface="Courier New" pitchFamily="34" charset="-120"/>
+              </a:rPr>
+              <a:t>  }</a:t>
+            </a:r>
+            <a:endParaRPr lang="en-US" sz="1600" dirty="0"/>
+          </a:p>
+          <a:p>
+            <a:pPr indent="0" marL="0">
+              <a:buNone/>
+            </a:pPr>
+            <a:r>
+              <a:rPr lang="en-US" sz="1600" dirty="0">
+                <a:solidFill>
+                  <a:srgbClr val="E6E6F0"/>
+                </a:solidFill>
+                <a:latin typeface="Courier New" pitchFamily="34" charset="0"/>
+                <a:ea typeface="Courier New" pitchFamily="34" charset="-122"/>
+                <a:cs typeface="Courier New" pitchFamily="34" charset="-120"/>
+              </a:rPr>
+              <a:t>}</a:t>
+            </a:r>
+            <a:endParaRPr lang="en-US" sz="1600" dirty="0"/>
+          </a:p>
+        </p:txBody>
+      </p:sp>
+      <p:sp>
+        <p:nvSpPr>
+          <p:cNvPr id="7" name="Shape 4"/>
+          <p:cNvSpPr/>
+          <p:nvPr/>
+        </p:nvSpPr>
+        <p:spPr>
+          <a:xfrm>
+            <a:off x="7680960" y="1371600"/>
+            <a:ext cx="3959352" cy="2514600"/>
+          </a:xfrm>
+          <a:prstGeom prst="roundRect">
+            <a:avLst>
+              <a:gd name="adj" fmla="val 3636"/>
+            </a:avLst>
+          </a:prstGeom>
+          <a:solidFill>
+            <a:srgbClr val="FDF0E3"/>
+          </a:solidFill>
+          <a:ln w="12700">
+            <a:solidFill>
+              <a:srgbClr val="FDF0E3"/>
+            </a:solidFill>
+            <a:prstDash val="solid"/>
+          </a:ln>
+        </p:spPr>
+      </p:sp>
+      <p:sp>
+        <p:nvSpPr>
+          <p:cNvPr id="8" name="Text 5"/>
+          <p:cNvSpPr txBox="1"/>
+          <p:nvPr/>
+        </p:nvSpPr>
+        <p:spPr>
+          <a:xfrm>
+            <a:off x="7909560" y="1371600"/>
+            <a:ext cx="3566160" cy="2514600"/>
+          </a:xfrm>
+          <a:prstGeom prst="rect">
+            <a:avLst/>
+          </a:prstGeom>
+          <a:noFill/>
+          <a:ln/>
+        </p:spPr>
+        <p:txBody>
+          <a:bodyPr wrap="square" lIns="0" tIns="0" rIns="0" bIns="0" rtlCol="0" anchor="ctr"/>
+          <a:lstStyle/>
+          <a:p>
+            <a:pPr indent="0" marL="0">
+              <a:spcAft>
+                <a:spcPts val="600"/>
+              </a:spcAft>
+              <a:buNone/>
+            </a:pPr>
+            <a:r>
+              <a:rPr lang="en-US" sz="1600" b="1" dirty="0">
+                <a:solidFill>
+                  <a:srgbClr val="22253A"/>
+                </a:solidFill>
+                <a:latin typeface="Courier New" pitchFamily="34" charset="0"/>
+                <a:ea typeface="Courier New" pitchFamily="34" charset="-122"/>
+                <a:cs typeface="Courier New" pitchFamily="34" charset="-120"/>
+              </a:rPr>
+              <a:t>cidrsubnet(blocco, 8, n)</a:t>
+            </a:r>
+            <a:endParaRPr lang="en-US" sz="1600" dirty="0"/>
+          </a:p>
+          <a:p>
+            <a:pPr indent="0" marL="0">
+              <a:spcAft>
+                <a:spcPts val="600"/>
+              </a:spcAft>
+              <a:buNone/>
+            </a:pPr>
+            <a:r>
+              <a:rPr lang="en-US" sz="1500" dirty="0">
+                <a:solidFill>
+                  <a:srgbClr val="22253A"/>
+                </a:solidFill>
+                <a:latin typeface="Calibri" pitchFamily="34" charset="0"/>
+                <a:ea typeface="Calibri" pitchFamily="34" charset="-122"/>
+                <a:cs typeface="Calibri" pitchFamily="34" charset="-120"/>
+              </a:rPr>
+              <a:t>divide la /16 in /24 e dà la numero n:</a:t>
+            </a:r>
+            <a:endParaRPr lang="en-US" sz="1600" dirty="0"/>
+          </a:p>
+          <a:p>
+            <a:pPr indent="0" marL="0">
+              <a:spcAft>
+                <a:spcPts val="600"/>
+              </a:spcAft>
+              <a:buNone/>
+            </a:pPr>
+            <a:r>
+              <a:rPr lang="en-US" sz="1500" dirty="0">
+                <a:solidFill>
+                  <a:srgbClr val="22253A"/>
+                </a:solidFill>
+                <a:latin typeface="Calibri" pitchFamily="34" charset="0"/>
+                <a:ea typeface="Calibri" pitchFamily="34" charset="-122"/>
+                <a:cs typeface="Calibri" pitchFamily="34" charset="-120"/>
+              </a:rPr>
+              <a:t>n finisce nel terzo numero</a:t>
+            </a:r>
+            <a:endParaRPr lang="en-US" sz="1600" dirty="0"/>
+          </a:p>
+          <a:p>
+            <a:pPr indent="0" marL="0">
+              <a:spcAft>
+                <a:spcPts val="600"/>
+              </a:spcAft>
+              <a:buNone/>
+            </a:pPr>
+            <a:r>
+              <a:rPr lang="en-US" sz="1600" b="1" dirty="0">
+                <a:solidFill>
+                  <a:srgbClr val="5B3FD0"/>
+                </a:solidFill>
+                <a:latin typeface="Courier New" pitchFamily="34" charset="0"/>
+                <a:ea typeface="Courier New" pitchFamily="34" charset="-122"/>
+                <a:cs typeface="Courier New" pitchFamily="34" charset="-120"/>
+              </a:rPr>
+              <a:t>n = 21 → 10.20.21.0/24</a:t>
             </a:r>
             <a:endParaRPr lang="en-US" sz="1600" dirty="0"/>
           </a:p>
@@ -8051,7 +9293,7 @@
       </p:sp>
       <p:graphicFrame>
         <p:nvGraphicFramePr>
-          <p:cNvPr id="17" name="Table 0"/>
+          <p:cNvPr id="18" name="Table 0"/>
           <p:cNvGraphicFramePr>
             <a:graphicFrameLocks noGrp="1"/>
           </p:cNvGraphicFramePr>
@@ -9150,7 +10392,7 @@
             <a:pPr algn="r"/>
             <a:fld id="{F7021451-1387-4CA6-816F-3879F97B5CBC}" type="slidenum">
               <a:rPr b="0" lang="en-US"/>
-              <a:t>16</a:t>
+              <a:t>17</a:t>
             </a:fld>
             <a:endParaRPr lang="en-US"/>
           </a:p>
@@ -9164,9 +10406,9 @@
 </p:sld>
 </file>
 
-<file path=ppt/slides/slide17.xml><?xml version="1.0" encoding="utf-8"?>
+<file path=ppt/slides/slide18.xml><?xml version="1.0" encoding="utf-8"?>
 <p:sld xmlns:a="http://schemas.openxmlformats.org/drawingml/2006/main" xmlns:r="http://schemas.openxmlformats.org/officeDocument/2006/relationships" xmlns:p="http://schemas.openxmlformats.org/presentationml/2006/main">
-  <p:cSld name="Slide 17">
+  <p:cSld name="Slide 18">
     <p:bg>
       <p:bgPr>
         <a:solidFill>
@@ -10268,7 +11510,7 @@
             <a:pPr algn="r"/>
             <a:fld id="{F7021451-1387-4CA6-816F-3879F97B5CBC}" type="slidenum">
               <a:rPr b="0" lang="en-US"/>
-              <a:t>17</a:t>
+              <a:t>18</a:t>
             </a:fld>
             <a:endParaRPr lang="en-US"/>
           </a:p>
@@ -10282,9 +11524,9 @@
 </p:sld>
 </file>
 
-<file path=ppt/slides/slide18.xml><?xml version="1.0" encoding="utf-8"?>
+<file path=ppt/slides/slide19.xml><?xml version="1.0" encoding="utf-8"?>
 <p:sld xmlns:a="http://schemas.openxmlformats.org/drawingml/2006/main" xmlns:r="http://schemas.openxmlformats.org/officeDocument/2006/relationships" xmlns:p="http://schemas.openxmlformats.org/presentationml/2006/main">
-  <p:cSld name="Slide 18">
+  <p:cSld name="Slide 19">
     <p:bg>
       <p:bgPr>
         <a:solidFill>
@@ -11702,6 +12944,97 @@
         </p:nvSpPr>
         <p:spPr>
           <a:xfrm>
+            <a:off x="7360920" y="1783080"/>
+            <a:ext cx="1097280" cy="0"/>
+          </a:xfrm>
+          <a:prstGeom prst="line">
+            <a:avLst/>
+          </a:prstGeom>
+          <a:noFill/>
+          <a:ln w="25400">
+            <a:solidFill>
+              <a:srgbClr val="1B1F3B"/>
+            </a:solidFill>
+            <a:prstDash val="solid"/>
+            <a:headEnd type="triangle"/>
+            <a:tailEnd type="triangle"/>
+          </a:ln>
+        </p:spPr>
+      </p:sp>
+      <p:sp>
+        <p:nvSpPr>
+          <p:cNvPr id="10" name="Shape 7"/>
+          <p:cNvSpPr/>
+          <p:nvPr/>
+        </p:nvSpPr>
+        <p:spPr>
+          <a:xfrm>
+            <a:off x="8503920" y="1463040"/>
+            <a:ext cx="2011680" cy="640080"/>
+          </a:xfrm>
+          <a:prstGeom prst="roundRect">
+            <a:avLst>
+              <a:gd name="adj" fmla="val 14286"/>
+            </a:avLst>
+          </a:prstGeom>
+          <a:solidFill>
+            <a:srgbClr val="F28C28"/>
+          </a:solidFill>
+          <a:ln w="12700">
+            <a:solidFill>
+              <a:srgbClr val="F28C28"/>
+            </a:solidFill>
+            <a:prstDash val="solid"/>
+          </a:ln>
+        </p:spPr>
+      </p:sp>
+      <p:sp>
+        <p:nvSpPr>
+          <p:cNvPr id="11" name="Text 8"/>
+          <p:cNvSpPr txBox="1"/>
+          <p:nvPr/>
+        </p:nvSpPr>
+        <p:spPr>
+          <a:xfrm>
+            <a:off x="8503920" y="1463040"/>
+            <a:ext cx="2011680" cy="640080"/>
+          </a:xfrm>
+          <a:prstGeom prst="rect">
+            <a:avLst/>
+          </a:prstGeom>
+          <a:noFill/>
+          <a:ln/>
+        </p:spPr>
+        <p:txBody>
+          <a:bodyPr wrap="square" lIns="76200" tIns="76200" rIns="76200" bIns="76200" rtlCol="0" anchor="ctr"/>
+          <a:lstStyle/>
+          <a:p>
+            <a:pPr algn="ctr" indent="0" marL="0">
+              <a:buNone/>
+            </a:pPr>
+            <a:r>
+              <a:rPr lang="en-US" sz="1600" b="1" dirty="0">
+                <a:solidFill>
+                  <a:srgbClr val="FFFFFF"/>
+                </a:solidFill>
+                <a:latin typeface="Calibri" pitchFamily="34" charset="0"/>
+                <a:ea typeface="Calibri" pitchFamily="34" charset="-122"/>
+                <a:cs typeface="Calibri" pitchFamily="34" charset="-120"/>
+              </a:rPr>
+              <a:t>Internet</a:t>
+            </a:r>
+            <a:endParaRPr lang="en-US" sz="1600" dirty="0"/>
+          </a:p>
+        </p:txBody>
+      </p:sp>
+      <p:sp>
+        <p:nvSpPr>
+          <p:cNvPr id="12" name="Shape 9"/>
+          <p:cNvSpPr/>
+          <p:nvPr/>
+        </p:nvSpPr>
+        <p:spPr>
+          <a:xfrm>
             <a:off x="822960" y="2331720"/>
             <a:ext cx="5303520" cy="3703320"/>
           </a:xfrm>
@@ -11723,14 +13056,14 @@
       </p:sp>
       <p:sp>
         <p:nvSpPr>
-          <p:cNvPr id="10" name="Text 7"/>
+          <p:cNvPr id="13" name="Text 10"/>
           <p:cNvSpPr txBox="1"/>
           <p:nvPr/>
         </p:nvSpPr>
         <p:spPr>
           <a:xfrm>
-            <a:off x="822960" y="2377440"/>
-            <a:ext cx="5303520" cy="365760"/>
+            <a:off x="1097280" y="2377440"/>
+            <a:ext cx="2743200" cy="365760"/>
           </a:xfrm>
           <a:prstGeom prst="rect">
             <a:avLst/>
@@ -11742,7 +13075,7 @@
           <a:bodyPr wrap="square" lIns="0" tIns="0" rIns="0" bIns="0" rtlCol="0" anchor="ctr"/>
           <a:lstStyle/>
           <a:p>
-            <a:pPr algn="ctr" indent="0" marL="0">
+            <a:pPr algn="l" indent="0" marL="0">
               <a:buNone/>
             </a:pPr>
             <a:r>
@@ -11762,7 +13095,7 @@
       </p:sp>
       <p:sp>
         <p:nvSpPr>
-          <p:cNvPr id="11" name="Shape 8"/>
+          <p:cNvPr id="14" name="Shape 11"/>
           <p:cNvSpPr/>
           <p:nvPr/>
         </p:nvSpPr>
@@ -11789,7 +13122,7 @@
       </p:sp>
       <p:sp>
         <p:nvSpPr>
-          <p:cNvPr id="12" name="Text 9"/>
+          <p:cNvPr id="15" name="Text 12"/>
           <p:cNvSpPr txBox="1"/>
           <p:nvPr/>
         </p:nvSpPr>
@@ -11812,7 +13145,7 @@
               <a:buNone/>
             </a:pPr>
             <a:r>
-              <a:rPr lang="en-US" sz="1500" b="1" dirty="0">
+              <a:rPr lang="en-US" sz="1600" b="1" dirty="0">
                 <a:solidFill>
                   <a:srgbClr val="22253A"/>
                 </a:solidFill>
@@ -11822,30 +13155,30 @@
               </a:rPr>
               <a:t>Subnet PUBBLICA</a:t>
             </a:r>
-            <a:endParaRPr lang="en-US" sz="1500" dirty="0"/>
+            <a:endParaRPr lang="en-US" sz="1600" dirty="0"/>
           </a:p>
           <a:p>
             <a:pPr algn="ctr" indent="0" marL="0">
               <a:buNone/>
             </a:pPr>
             <a:r>
-              <a:rPr lang="en-US" sz="1300" dirty="0">
+              <a:rPr lang="en-US" sz="1400" dirty="0">
                 <a:solidFill>
                   <a:srgbClr val="22253A"/>
                 </a:solidFill>
-                <a:latin typeface="Courier New" pitchFamily="34" charset="0"/>
-                <a:ea typeface="Courier New" pitchFamily="34" charset="-122"/>
-                <a:cs typeface="Courier New" pitchFamily="34" charset="-120"/>
-              </a:rPr>
-              <a:t>10.20.0.0/24 · NAT</a:t>
-            </a:r>
-            <a:endParaRPr lang="en-US" sz="1500" dirty="0"/>
-          </a:p>
-        </p:txBody>
-      </p:sp>
-      <p:sp>
-        <p:nvSpPr>
-          <p:cNvPr id="13" name="Shape 10"/>
+                <a:latin typeface="Calibri" pitchFamily="34" charset="0"/>
+                <a:ea typeface="Calibri" pitchFamily="34" charset="-122"/>
+                <a:cs typeface="Calibri" pitchFamily="34" charset="-120"/>
+              </a:rPr>
+              <a:t>NAT Gateway · entra ed esce</a:t>
+            </a:r>
+            <a:endParaRPr lang="en-US" sz="1600" dirty="0"/>
+          </a:p>
+        </p:txBody>
+      </p:sp>
+      <p:sp>
+        <p:nvSpPr>
+          <p:cNvPr id="16" name="Shape 13"/>
           <p:cNvSpPr/>
           <p:nvPr/>
         </p:nvSpPr>
@@ -11872,7 +13205,7 @@
       </p:sp>
       <p:sp>
         <p:nvSpPr>
-          <p:cNvPr id="14" name="Text 11"/>
+          <p:cNvPr id="17" name="Text 14"/>
           <p:cNvSpPr txBox="1"/>
           <p:nvPr/>
         </p:nvSpPr>
@@ -11895,7 +13228,7 @@
               <a:buNone/>
             </a:pPr>
             <a:r>
-              <a:rPr lang="en-US" sz="1500" b="1" dirty="0">
+              <a:rPr lang="en-US" sz="1600" b="1" dirty="0">
                 <a:solidFill>
                   <a:srgbClr val="22253A"/>
                 </a:solidFill>
@@ -11905,30 +13238,30 @@
               </a:rPr>
               <a:t>Subnet PRIVATA</a:t>
             </a:r>
-            <a:endParaRPr lang="en-US" sz="1500" dirty="0"/>
+            <a:endParaRPr lang="en-US" sz="1600" dirty="0"/>
           </a:p>
           <a:p>
             <a:pPr algn="ctr" indent="0" marL="0">
               <a:buNone/>
             </a:pPr>
             <a:r>
-              <a:rPr lang="en-US" sz="1300" dirty="0">
+              <a:rPr lang="en-US" sz="1400" dirty="0">
                 <a:solidFill>
                   <a:srgbClr val="22253A"/>
                 </a:solidFill>
-                <a:latin typeface="Courier New" pitchFamily="34" charset="0"/>
-                <a:ea typeface="Courier New" pitchFamily="34" charset="-122"/>
-                <a:cs typeface="Courier New" pitchFamily="34" charset="-120"/>
-              </a:rPr>
-              <a:t>10.20.10.0/24 · EC2</a:t>
-            </a:r>
-            <a:endParaRPr lang="en-US" sz="1500" dirty="0"/>
-          </a:p>
-        </p:txBody>
-      </p:sp>
-      <p:sp>
-        <p:nvSpPr>
-          <p:cNvPr id="15" name="Shape 12"/>
+                <a:latin typeface="Calibri" pitchFamily="34" charset="0"/>
+                <a:ea typeface="Calibri" pitchFamily="34" charset="-122"/>
+                <a:cs typeface="Calibri" pitchFamily="34" charset="-120"/>
+              </a:rPr>
+              <a:t>EC2 · esce tramite il NAT</a:t>
+            </a:r>
+            <a:endParaRPr lang="en-US" sz="1600" dirty="0"/>
+          </a:p>
+        </p:txBody>
+      </p:sp>
+      <p:sp>
+        <p:nvSpPr>
+          <p:cNvPr id="18" name="Shape 15"/>
           <p:cNvSpPr/>
           <p:nvPr/>
         </p:nvSpPr>
@@ -11955,7 +13288,7 @@
       </p:sp>
       <p:sp>
         <p:nvSpPr>
-          <p:cNvPr id="16" name="Text 13"/>
+          <p:cNvPr id="19" name="Text 16"/>
           <p:cNvSpPr txBox="1"/>
           <p:nvPr/>
         </p:nvSpPr>
@@ -11978,7 +13311,7 @@
               <a:buNone/>
             </a:pPr>
             <a:r>
-              <a:rPr lang="en-US" sz="1500" b="1" dirty="0">
+              <a:rPr lang="en-US" sz="1600" b="1" dirty="0">
                 <a:solidFill>
                   <a:srgbClr val="22253A"/>
                 </a:solidFill>
@@ -11988,30 +13321,30 @@
               </a:rPr>
               <a:t>Subnet DATABASE</a:t>
             </a:r>
-            <a:endParaRPr lang="en-US" sz="1500" dirty="0"/>
+            <a:endParaRPr lang="en-US" sz="1600" dirty="0"/>
           </a:p>
           <a:p>
             <a:pPr algn="ctr" indent="0" marL="0">
               <a:buNone/>
             </a:pPr>
             <a:r>
-              <a:rPr lang="en-US" sz="1300" dirty="0">
+              <a:rPr lang="en-US" sz="1400" dirty="0">
                 <a:solidFill>
                   <a:srgbClr val="22253A"/>
                 </a:solidFill>
-                <a:latin typeface="Courier New" pitchFamily="34" charset="0"/>
-                <a:ea typeface="Courier New" pitchFamily="34" charset="-122"/>
-                <a:cs typeface="Courier New" pitchFamily="34" charset="-120"/>
-              </a:rPr>
-              <a:t>10.20.20.0/24 · RDS</a:t>
-            </a:r>
-            <a:endParaRPr lang="en-US" sz="1500" dirty="0"/>
-          </a:p>
-        </p:txBody>
-      </p:sp>
-      <p:sp>
-        <p:nvSpPr>
-          <p:cNvPr id="17" name="Shape 14"/>
+                <a:latin typeface="Calibri" pitchFamily="34" charset="0"/>
+                <a:ea typeface="Calibri" pitchFamily="34" charset="-122"/>
+                <a:cs typeface="Calibri" pitchFamily="34" charset="-120"/>
+              </a:rPr>
+              <a:t>RDS · nessuna uscita</a:t>
+            </a:r>
+            <a:endParaRPr lang="en-US" sz="1600" dirty="0"/>
+          </a:p>
+        </p:txBody>
+      </p:sp>
+      <p:sp>
+        <p:nvSpPr>
+          <p:cNvPr id="20" name="Shape 17"/>
           <p:cNvSpPr/>
           <p:nvPr/>
         </p:nvSpPr>
@@ -12038,14 +13371,14 @@
       </p:sp>
       <p:sp>
         <p:nvSpPr>
-          <p:cNvPr id="18" name="Text 15"/>
+          <p:cNvPr id="21" name="Text 18"/>
           <p:cNvSpPr txBox="1"/>
           <p:nvPr/>
         </p:nvSpPr>
         <p:spPr>
           <a:xfrm>
-            <a:off x="6400800" y="2377440"/>
-            <a:ext cx="5303520" cy="365760"/>
+            <a:off x="8686800" y="2377440"/>
+            <a:ext cx="2743200" cy="365760"/>
           </a:xfrm>
           <a:prstGeom prst="rect">
             <a:avLst/>
@@ -12057,7 +13390,7 @@
           <a:bodyPr wrap="square" lIns="0" tIns="0" rIns="0" bIns="0" rtlCol="0" anchor="ctr"/>
           <a:lstStyle/>
           <a:p>
-            <a:pPr algn="ctr" indent="0" marL="0">
+            <a:pPr algn="r" indent="0" marL="0">
               <a:buNone/>
             </a:pPr>
             <a:r>
@@ -12077,7 +13410,7 @@
       </p:sp>
       <p:sp>
         <p:nvSpPr>
-          <p:cNvPr id="19" name="Shape 16"/>
+          <p:cNvPr id="22" name="Shape 19"/>
           <p:cNvSpPr/>
           <p:nvPr/>
         </p:nvSpPr>
@@ -12104,7 +13437,7 @@
       </p:sp>
       <p:sp>
         <p:nvSpPr>
-          <p:cNvPr id="20" name="Text 17"/>
+          <p:cNvPr id="23" name="Text 20"/>
           <p:cNvSpPr txBox="1"/>
           <p:nvPr/>
         </p:nvSpPr>
@@ -12127,7 +13460,7 @@
               <a:buNone/>
             </a:pPr>
             <a:r>
-              <a:rPr lang="en-US" sz="1500" b="1" dirty="0">
+              <a:rPr lang="en-US" sz="1600" b="1" dirty="0">
                 <a:solidFill>
                   <a:srgbClr val="22253A"/>
                 </a:solidFill>
@@ -12137,30 +13470,30 @@
               </a:rPr>
               <a:t>Subnet PUBBLICA</a:t>
             </a:r>
-            <a:endParaRPr lang="en-US" sz="1500" dirty="0"/>
+            <a:endParaRPr lang="en-US" sz="1600" dirty="0"/>
           </a:p>
           <a:p>
             <a:pPr algn="ctr" indent="0" marL="0">
               <a:buNone/>
             </a:pPr>
             <a:r>
-              <a:rPr lang="en-US" sz="1300" dirty="0">
+              <a:rPr lang="en-US" sz="1400" dirty="0">
                 <a:solidFill>
                   <a:srgbClr val="22253A"/>
                 </a:solidFill>
-                <a:latin typeface="Courier New" pitchFamily="34" charset="0"/>
-                <a:ea typeface="Courier New" pitchFamily="34" charset="-122"/>
-                <a:cs typeface="Courier New" pitchFamily="34" charset="-120"/>
-              </a:rPr>
-              <a:t>10.20.1.0/24</a:t>
-            </a:r>
-            <a:endParaRPr lang="en-US" sz="1500" dirty="0"/>
-          </a:p>
-        </p:txBody>
-      </p:sp>
-      <p:sp>
-        <p:nvSpPr>
-          <p:cNvPr id="21" name="Shape 18"/>
+                <a:latin typeface="Calibri" pitchFamily="34" charset="0"/>
+                <a:ea typeface="Calibri" pitchFamily="34" charset="-122"/>
+                <a:cs typeface="Calibri" pitchFamily="34" charset="-120"/>
+              </a:rPr>
+              <a:t>entra ed esce</a:t>
+            </a:r>
+            <a:endParaRPr lang="en-US" sz="1600" dirty="0"/>
+          </a:p>
+        </p:txBody>
+      </p:sp>
+      <p:sp>
+        <p:nvSpPr>
+          <p:cNvPr id="24" name="Shape 21"/>
           <p:cNvSpPr/>
           <p:nvPr/>
         </p:nvSpPr>
@@ -12187,7 +13520,7 @@
       </p:sp>
       <p:sp>
         <p:nvSpPr>
-          <p:cNvPr id="22" name="Text 19"/>
+          <p:cNvPr id="25" name="Text 22"/>
           <p:cNvSpPr txBox="1"/>
           <p:nvPr/>
         </p:nvSpPr>
@@ -12210,7 +13543,7 @@
               <a:buNone/>
             </a:pPr>
             <a:r>
-              <a:rPr lang="en-US" sz="1500" b="1" dirty="0">
+              <a:rPr lang="en-US" sz="1600" b="1" dirty="0">
                 <a:solidFill>
                   <a:srgbClr val="22253A"/>
                 </a:solidFill>
@@ -12220,30 +13553,30 @@
               </a:rPr>
               <a:t>Subnet PRIVATA</a:t>
             </a:r>
-            <a:endParaRPr lang="en-US" sz="1500" dirty="0"/>
+            <a:endParaRPr lang="en-US" sz="1600" dirty="0"/>
           </a:p>
           <a:p>
             <a:pPr algn="ctr" indent="0" marL="0">
               <a:buNone/>
             </a:pPr>
             <a:r>
-              <a:rPr lang="en-US" sz="1300" dirty="0">
+              <a:rPr lang="en-US" sz="1400" dirty="0">
                 <a:solidFill>
                   <a:srgbClr val="22253A"/>
                 </a:solidFill>
-                <a:latin typeface="Courier New" pitchFamily="34" charset="0"/>
-                <a:ea typeface="Courier New" pitchFamily="34" charset="-122"/>
-                <a:cs typeface="Courier New" pitchFamily="34" charset="-120"/>
-              </a:rPr>
-              <a:t>10.20.11.0/24 · EC2</a:t>
-            </a:r>
-            <a:endParaRPr lang="en-US" sz="1500" dirty="0"/>
-          </a:p>
-        </p:txBody>
-      </p:sp>
-      <p:sp>
-        <p:nvSpPr>
-          <p:cNvPr id="23" name="Shape 20"/>
+                <a:latin typeface="Calibri" pitchFamily="34" charset="0"/>
+                <a:ea typeface="Calibri" pitchFamily="34" charset="-122"/>
+                <a:cs typeface="Calibri" pitchFamily="34" charset="-120"/>
+              </a:rPr>
+              <a:t>EC2 · esce tramite il NAT della AZ-a</a:t>
+            </a:r>
+            <a:endParaRPr lang="en-US" sz="1600" dirty="0"/>
+          </a:p>
+        </p:txBody>
+      </p:sp>
+      <p:sp>
+        <p:nvSpPr>
+          <p:cNvPr id="26" name="Shape 23"/>
           <p:cNvSpPr/>
           <p:nvPr/>
         </p:nvSpPr>
@@ -12270,7 +13603,7 @@
       </p:sp>
       <p:sp>
         <p:nvSpPr>
-          <p:cNvPr id="24" name="Text 21"/>
+          <p:cNvPr id="27" name="Text 24"/>
           <p:cNvSpPr txBox="1"/>
           <p:nvPr/>
         </p:nvSpPr>
@@ -12293,7 +13626,7 @@
               <a:buNone/>
             </a:pPr>
             <a:r>
-              <a:rPr lang="en-US" sz="1500" b="1" dirty="0">
+              <a:rPr lang="en-US" sz="1600" b="1" dirty="0">
                 <a:solidFill>
                   <a:srgbClr val="22253A"/>
                 </a:solidFill>
@@ -12303,26 +13636,76 @@
               </a:rPr>
               <a:t>Subnet DATABASE</a:t>
             </a:r>
-            <a:endParaRPr lang="en-US" sz="1500" dirty="0"/>
+            <a:endParaRPr lang="en-US" sz="1600" dirty="0"/>
           </a:p>
           <a:p>
             <a:pPr algn="ctr" indent="0" marL="0">
               <a:buNone/>
             </a:pPr>
             <a:r>
-              <a:rPr lang="en-US" sz="1300" dirty="0">
+              <a:rPr lang="en-US" sz="1400" dirty="0">
                 <a:solidFill>
                   <a:srgbClr val="22253A"/>
                 </a:solidFill>
-                <a:latin typeface="Courier New" pitchFamily="34" charset="0"/>
-                <a:ea typeface="Courier New" pitchFamily="34" charset="-122"/>
-                <a:cs typeface="Courier New" pitchFamily="34" charset="-120"/>
-              </a:rPr>
-              <a:t>10.20.21.0/24 · RDS</a:t>
-            </a:r>
-            <a:endParaRPr lang="en-US" sz="1500" dirty="0"/>
-          </a:p>
-        </p:txBody>
+                <a:latin typeface="Calibri" pitchFamily="34" charset="0"/>
+                <a:ea typeface="Calibri" pitchFamily="34" charset="-122"/>
+                <a:cs typeface="Calibri" pitchFamily="34" charset="-120"/>
+              </a:rPr>
+              <a:t>RDS · nessuna uscita</a:t>
+            </a:r>
+            <a:endParaRPr lang="en-US" sz="1600" dirty="0"/>
+          </a:p>
+        </p:txBody>
+      </p:sp>
+      <p:sp>
+        <p:nvSpPr>
+          <p:cNvPr id="28" name="Shape 25"/>
+          <p:cNvSpPr/>
+          <p:nvPr/>
+        </p:nvSpPr>
+        <p:spPr>
+          <a:xfrm>
+            <a:off x="5394960" y="2103120"/>
+            <a:ext cx="0" cy="685800"/>
+          </a:xfrm>
+          <a:prstGeom prst="line">
+            <a:avLst/>
+          </a:prstGeom>
+          <a:noFill/>
+          <a:ln w="25400">
+            <a:solidFill>
+              <a:srgbClr val="1B1F3B"/>
+            </a:solidFill>
+            <a:prstDash val="solid"/>
+            <a:headEnd type="triangle"/>
+            <a:tailEnd type="triangle"/>
+          </a:ln>
+        </p:spPr>
+      </p:sp>
+      <p:sp>
+        <p:nvSpPr>
+          <p:cNvPr id="29" name="Shape 26"/>
+          <p:cNvSpPr/>
+          <p:nvPr/>
+        </p:nvSpPr>
+        <p:spPr>
+          <a:xfrm>
+            <a:off x="6766560" y="2103120"/>
+            <a:ext cx="0" cy="685800"/>
+          </a:xfrm>
+          <a:prstGeom prst="line">
+            <a:avLst/>
+          </a:prstGeom>
+          <a:noFill/>
+          <a:ln w="25400">
+            <a:solidFill>
+              <a:srgbClr val="1B1F3B"/>
+            </a:solidFill>
+            <a:prstDash val="solid"/>
+            <a:headEnd type="triangle"/>
+            <a:tailEnd type="triangle"/>
+          </a:ln>
+        </p:spPr>
       </p:sp>
       <p:sp>
         <p:nvSpPr>

--- a/slide/slide-2-vpc.pptx
+++ b/slide/slide-2-vpc.pptx
@@ -8259,12 +8259,12 @@
         </p:nvSpPr>
         <p:spPr>
           <a:xfrm>
-            <a:off x="548640" y="2286000"/>
-            <a:ext cx="5669280" cy="868680"/>
+            <a:off x="548640" y="2240280"/>
+            <a:ext cx="5669280" cy="777240"/>
           </a:xfrm>
           <a:prstGeom prst="roundRect">
             <a:avLst>
-              <a:gd name="adj" fmla="val 8421"/>
+              <a:gd name="adj" fmla="val 9412"/>
             </a:avLst>
           </a:prstGeom>
           <a:solidFill>
@@ -8286,8 +8286,8 @@
         </p:nvSpPr>
         <p:spPr>
           <a:xfrm>
-            <a:off x="731520" y="2423160"/>
-            <a:ext cx="5303520" cy="594360"/>
+            <a:off x="731520" y="2377440"/>
+            <a:ext cx="5303520" cy="502920"/>
           </a:xfrm>
           <a:prstGeom prst="rect">
             <a:avLst/>
@@ -8325,7 +8325,7 @@
         </p:nvSpPr>
         <p:spPr>
           <a:xfrm>
-            <a:off x="6263640" y="2715768"/>
+            <a:off x="6263640" y="2624328"/>
             <a:ext cx="365760" cy="0"/>
           </a:xfrm>
           <a:prstGeom prst="line">
@@ -8349,12 +8349,12 @@
         </p:nvSpPr>
         <p:spPr>
           <a:xfrm>
-            <a:off x="6720840" y="2286000"/>
-            <a:ext cx="2651760" cy="868680"/>
+            <a:off x="6720840" y="2240280"/>
+            <a:ext cx="2651760" cy="777240"/>
           </a:xfrm>
           <a:prstGeom prst="roundRect">
             <a:avLst>
-              <a:gd name="adj" fmla="val 10526"/>
+              <a:gd name="adj" fmla="val 11765"/>
             </a:avLst>
           </a:prstGeom>
           <a:solidFill>
@@ -8376,8 +8376,8 @@
         </p:nvSpPr>
         <p:spPr>
           <a:xfrm>
-            <a:off x="6720840" y="2286000"/>
-            <a:ext cx="2651760" cy="868680"/>
+            <a:off x="6720840" y="2240280"/>
+            <a:ext cx="2651760" cy="777240"/>
           </a:xfrm>
           <a:prstGeom prst="rect">
             <a:avLst/>
@@ -8415,8 +8415,8 @@
         </p:nvSpPr>
         <p:spPr>
           <a:xfrm>
-            <a:off x="9509760" y="2286000"/>
-            <a:ext cx="2130552" cy="868680"/>
+            <a:off x="9509760" y="2240280"/>
+            <a:ext cx="2130552" cy="777240"/>
           </a:xfrm>
           <a:prstGeom prst="rect">
             <a:avLst/>
@@ -8432,7 +8432,7 @@
               <a:buNone/>
             </a:pPr>
             <a:r>
-              <a:rPr lang="en-US" sz="1500" b="1" dirty="0">
+              <a:rPr lang="en-US" sz="1600" b="1" dirty="0">
                 <a:solidFill>
                   <a:srgbClr val="22253A"/>
                 </a:solidFill>
@@ -8440,26 +8440,65 @@
                 <a:ea typeface="Calibri" pitchFamily="34" charset="-122"/>
                 <a:cs typeface="Calibri" pitchFamily="34" charset="-120"/>
               </a:rPr>
-              <a:t>[ ] → produce una LISTA</a:t>
-            </a:r>
-            <a:endParaRPr lang="en-US" sz="1500" dirty="0"/>
-          </a:p>
-        </p:txBody>
-      </p:sp>
-      <p:sp>
-        <p:nvSpPr>
-          <p:cNvPr id="13" name="Shape 10"/>
+              <a:t>[ ] → una LISTA</a:t>
+            </a:r>
+            <a:endParaRPr lang="en-US" sz="1600" dirty="0"/>
+          </a:p>
+        </p:txBody>
+      </p:sp>
+      <p:sp>
+        <p:nvSpPr>
+          <p:cNvPr id="13" name="Text 10"/>
+          <p:cNvSpPr txBox="1"/>
+          <p:nvPr/>
+        </p:nvSpPr>
+        <p:spPr>
+          <a:xfrm>
+            <a:off x="640080" y="3063240"/>
+            <a:ext cx="11094415" cy="384048"/>
+          </a:xfrm>
+          <a:prstGeom prst="rect">
+            <a:avLst/>
+          </a:prstGeom>
+          <a:noFill/>
+          <a:ln/>
+        </p:spPr>
+        <p:txBody>
+          <a:bodyPr wrap="square" lIns="0" tIns="0" rIns="0" bIns="0" rtlCol="0" anchor="ctr"/>
+          <a:lstStyle/>
+          <a:p>
+            <a:pPr algn="l" indent="0" marL="0">
+              <a:buNone/>
+            </a:pPr>
+            <a:r>
+              <a:rPr lang="en-US" sz="1600" i="1" dirty="0">
+                <a:solidFill>
+                  <a:srgbClr val="5F6478"/>
+                </a:solidFill>
+                <a:latin typeface="Calibri" pitchFamily="34" charset="0"/>
+                <a:ea typeface="Calibri" pitchFamily="34" charset="-122"/>
+                <a:cs typeface="Calibri" pitchFamily="34" charset="-120"/>
+              </a:rPr>
+              <a:t>Per ogni x fra "a" e "b", metti upper(x) in una lista.</a:t>
+            </a:r>
+            <a:endParaRPr lang="en-US" sz="1600" dirty="0"/>
+          </a:p>
+        </p:txBody>
+      </p:sp>
+      <p:sp>
+        <p:nvSpPr>
+          <p:cNvPr id="14" name="Shape 11"/>
           <p:cNvSpPr/>
           <p:nvPr/>
         </p:nvSpPr>
         <p:spPr>
           <a:xfrm>
             <a:off x="548640" y="3611880"/>
-            <a:ext cx="5669280" cy="868680"/>
+            <a:ext cx="5669280" cy="777240"/>
           </a:xfrm>
           <a:prstGeom prst="roundRect">
             <a:avLst>
-              <a:gd name="adj" fmla="val 8421"/>
+              <a:gd name="adj" fmla="val 9412"/>
             </a:avLst>
           </a:prstGeom>
           <a:solidFill>
@@ -8475,14 +8514,14 @@
       </p:sp>
       <p:sp>
         <p:nvSpPr>
-          <p:cNvPr id="14" name="Text 11"/>
+          <p:cNvPr id="15" name="Text 12"/>
           <p:cNvSpPr txBox="1"/>
           <p:nvPr/>
         </p:nvSpPr>
         <p:spPr>
           <a:xfrm>
             <a:off x="731520" y="3749040"/>
-            <a:ext cx="5303520" cy="594360"/>
+            <a:ext cx="5303520" cy="502920"/>
           </a:xfrm>
           <a:prstGeom prst="rect">
             <a:avLst/>
@@ -8514,13 +8553,13 @@
       </p:sp>
       <p:sp>
         <p:nvSpPr>
-          <p:cNvPr id="15" name="Shape 12"/>
+          <p:cNvPr id="16" name="Shape 13"/>
           <p:cNvSpPr/>
           <p:nvPr/>
         </p:nvSpPr>
         <p:spPr>
           <a:xfrm>
-            <a:off x="6263640" y="4041648"/>
+            <a:off x="6263640" y="3995928"/>
             <a:ext cx="365760" cy="0"/>
           </a:xfrm>
           <a:prstGeom prst="line">
@@ -8538,18 +8577,18 @@
       </p:sp>
       <p:sp>
         <p:nvSpPr>
-          <p:cNvPr id="16" name="Shape 13"/>
+          <p:cNvPr id="17" name="Shape 14"/>
           <p:cNvSpPr/>
           <p:nvPr/>
         </p:nvSpPr>
         <p:spPr>
           <a:xfrm>
             <a:off x="6720840" y="3611880"/>
-            <a:ext cx="2651760" cy="868680"/>
+            <a:ext cx="2651760" cy="777240"/>
           </a:xfrm>
           <a:prstGeom prst="roundRect">
             <a:avLst>
-              <a:gd name="adj" fmla="val 10526"/>
+              <a:gd name="adj" fmla="val 11765"/>
             </a:avLst>
           </a:prstGeom>
           <a:solidFill>
@@ -8565,14 +8604,14 @@
       </p:sp>
       <p:sp>
         <p:nvSpPr>
-          <p:cNvPr id="17" name="Text 14"/>
+          <p:cNvPr id="18" name="Text 15"/>
           <p:cNvSpPr txBox="1"/>
           <p:nvPr/>
         </p:nvSpPr>
         <p:spPr>
           <a:xfrm>
             <a:off x="6720840" y="3611880"/>
-            <a:ext cx="2651760" cy="868680"/>
+            <a:ext cx="2651760" cy="777240"/>
           </a:xfrm>
           <a:prstGeom prst="rect">
             <a:avLst/>
@@ -8604,14 +8643,14 @@
       </p:sp>
       <p:sp>
         <p:nvSpPr>
-          <p:cNvPr id="18" name="Text 15"/>
+          <p:cNvPr id="19" name="Text 16"/>
           <p:cNvSpPr txBox="1"/>
           <p:nvPr/>
         </p:nvSpPr>
         <p:spPr>
           <a:xfrm>
             <a:off x="9509760" y="3611880"/>
-            <a:ext cx="2130552" cy="868680"/>
+            <a:ext cx="2130552" cy="777240"/>
           </a:xfrm>
           <a:prstGeom prst="rect">
             <a:avLst/>
@@ -8627,7 +8666,7 @@
               <a:buNone/>
             </a:pPr>
             <a:r>
-              <a:rPr lang="en-US" sz="1500" b="1" dirty="0">
+              <a:rPr lang="en-US" sz="1600" b="1" dirty="0">
                 <a:solidFill>
                   <a:srgbClr val="22253A"/>
                 </a:solidFill>
@@ -8637,24 +8676,63 @@
               </a:rPr>
               <a:t>{ } e =&gt; → una MAPPA</a:t>
             </a:r>
-            <a:endParaRPr lang="en-US" sz="1500" dirty="0"/>
-          </a:p>
-        </p:txBody>
-      </p:sp>
-      <p:sp>
-        <p:nvSpPr>
-          <p:cNvPr id="19" name="Shape 16"/>
+            <a:endParaRPr lang="en-US" sz="1600" dirty="0"/>
+          </a:p>
+        </p:txBody>
+      </p:sp>
+      <p:sp>
+        <p:nvSpPr>
+          <p:cNvPr id="20" name="Text 17"/>
+          <p:cNvSpPr txBox="1"/>
+          <p:nvPr/>
+        </p:nvSpPr>
+        <p:spPr>
+          <a:xfrm>
+            <a:off x="640080" y="4434840"/>
+            <a:ext cx="11094415" cy="384048"/>
+          </a:xfrm>
+          <a:prstGeom prst="rect">
+            <a:avLst/>
+          </a:prstGeom>
+          <a:noFill/>
+          <a:ln/>
+        </p:spPr>
+        <p:txBody>
+          <a:bodyPr wrap="square" lIns="0" tIns="0" rIns="0" bIns="0" rtlCol="0" anchor="ctr"/>
+          <a:lstStyle/>
+          <a:p>
+            <a:pPr algn="l" indent="0" marL="0">
+              <a:buNone/>
+            </a:pPr>
+            <a:r>
+              <a:rPr lang="en-US" sz="1600" i="1" dirty="0">
+                <a:solidFill>
+                  <a:srgbClr val="5F6478"/>
+                </a:solidFill>
+                <a:latin typeface="Calibri" pitchFamily="34" charset="0"/>
+                <a:ea typeface="Calibri" pitchFamily="34" charset="-122"/>
+                <a:cs typeface="Calibri" pitchFamily="34" charset="-120"/>
+              </a:rPr>
+              <a:t>Per ogni x, crea la coppia chiave x → valore upper(x).</a:t>
+            </a:r>
+            <a:endParaRPr lang="en-US" sz="1600" dirty="0"/>
+          </a:p>
+        </p:txBody>
+      </p:sp>
+      <p:sp>
+        <p:nvSpPr>
+          <p:cNvPr id="21" name="Shape 18"/>
           <p:cNvSpPr/>
           <p:nvPr/>
         </p:nvSpPr>
         <p:spPr>
           <a:xfrm>
-            <a:off x="548640" y="4937760"/>
-            <a:ext cx="5669280" cy="868680"/>
+            <a:off x="548640" y="4983480"/>
+            <a:ext cx="5669280" cy="777240"/>
           </a:xfrm>
           <a:prstGeom prst="roundRect">
             <a:avLst>
-              <a:gd name="adj" fmla="val 8421"/>
+              <a:gd name="adj" fmla="val 9412"/>
             </a:avLst>
           </a:prstGeom>
           <a:solidFill>
@@ -8670,14 +8748,14 @@
       </p:sp>
       <p:sp>
         <p:nvSpPr>
-          <p:cNvPr id="20" name="Text 17"/>
+          <p:cNvPr id="22" name="Text 19"/>
           <p:cNvSpPr txBox="1"/>
           <p:nvPr/>
         </p:nvSpPr>
         <p:spPr>
           <a:xfrm>
-            <a:off x="731520" y="5074920"/>
-            <a:ext cx="5303520" cy="594360"/>
+            <a:off x="731520" y="5120640"/>
+            <a:ext cx="5303520" cy="502920"/>
           </a:xfrm>
           <a:prstGeom prst="rect">
             <a:avLst/>
@@ -8709,7 +8787,7 @@
       </p:sp>
       <p:sp>
         <p:nvSpPr>
-          <p:cNvPr id="21" name="Shape 18"/>
+          <p:cNvPr id="23" name="Shape 20"/>
           <p:cNvSpPr/>
           <p:nvPr/>
         </p:nvSpPr>
@@ -8733,18 +8811,18 @@
       </p:sp>
       <p:sp>
         <p:nvSpPr>
-          <p:cNvPr id="22" name="Shape 19"/>
+          <p:cNvPr id="24" name="Shape 21"/>
           <p:cNvSpPr/>
           <p:nvPr/>
         </p:nvSpPr>
         <p:spPr>
           <a:xfrm>
-            <a:off x="6720840" y="4937760"/>
-            <a:ext cx="2651760" cy="868680"/>
+            <a:off x="6720840" y="4983480"/>
+            <a:ext cx="2651760" cy="777240"/>
           </a:xfrm>
           <a:prstGeom prst="roundRect">
             <a:avLst>
-              <a:gd name="adj" fmla="val 10526"/>
+              <a:gd name="adj" fmla="val 11765"/>
             </a:avLst>
           </a:prstGeom>
           <a:solidFill>
@@ -8760,14 +8838,14 @@
       </p:sp>
       <p:sp>
         <p:nvSpPr>
-          <p:cNvPr id="23" name="Text 20"/>
+          <p:cNvPr id="25" name="Text 22"/>
           <p:cNvSpPr txBox="1"/>
           <p:nvPr/>
         </p:nvSpPr>
         <p:spPr>
           <a:xfrm>
-            <a:off x="6720840" y="4937760"/>
-            <a:ext cx="2651760" cy="868680"/>
+            <a:off x="6720840" y="4983480"/>
+            <a:ext cx="2651760" cy="777240"/>
           </a:xfrm>
           <a:prstGeom prst="rect">
             <a:avLst/>
@@ -8799,14 +8877,14 @@
       </p:sp>
       <p:sp>
         <p:nvSpPr>
-          <p:cNvPr id="24" name="Text 21"/>
+          <p:cNvPr id="26" name="Text 23"/>
           <p:cNvSpPr txBox="1"/>
           <p:nvPr/>
         </p:nvSpPr>
         <p:spPr>
           <a:xfrm>
-            <a:off x="9509760" y="4937760"/>
-            <a:ext cx="2130552" cy="868680"/>
+            <a:off x="9509760" y="4983480"/>
+            <a:ext cx="2130552" cy="777240"/>
           </a:xfrm>
           <a:prstGeom prst="rect">
             <a:avLst/>
@@ -8822,7 +8900,7 @@
               <a:buNone/>
             </a:pPr>
             <a:r>
-              <a:rPr lang="en-US" sz="1500" b="1" dirty="0">
+              <a:rPr lang="en-US" sz="1600" b="1" dirty="0">
                 <a:solidFill>
                   <a:srgbClr val="22253A"/>
                 </a:solidFill>
@@ -8830,9 +8908,48 @@
                 <a:ea typeface="Calibri" pitchFamily="34" charset="-122"/>
                 <a:cs typeface="Calibri" pitchFamily="34" charset="-120"/>
               </a:rPr>
-              <a:t>i = la posizione (da 0)</a:t>
-            </a:r>
-            <a:endParaRPr lang="en-US" sz="1500" dirty="0"/>
+              <a:t>i = la posizione</a:t>
+            </a:r>
+            <a:endParaRPr lang="en-US" sz="1600" dirty="0"/>
+          </a:p>
+        </p:txBody>
+      </p:sp>
+      <p:sp>
+        <p:nvSpPr>
+          <p:cNvPr id="27" name="Text 24"/>
+          <p:cNvSpPr txBox="1"/>
+          <p:nvPr/>
+        </p:nvSpPr>
+        <p:spPr>
+          <a:xfrm>
+            <a:off x="640080" y="5806440"/>
+            <a:ext cx="11094415" cy="384048"/>
+          </a:xfrm>
+          <a:prstGeom prst="rect">
+            <a:avLst/>
+          </a:prstGeom>
+          <a:noFill/>
+          <a:ln/>
+        </p:spPr>
+        <p:txBody>
+          <a:bodyPr wrap="square" lIns="0" tIns="0" rIns="0" bIns="0" rtlCol="0" anchor="ctr"/>
+          <a:lstStyle/>
+          <a:p>
+            <a:pPr algn="l" indent="0" marL="0">
+              <a:buNone/>
+            </a:pPr>
+            <a:r>
+              <a:rPr lang="en-US" sz="1600" i="1" dirty="0">
+                <a:solidFill>
+                  <a:srgbClr val="5F6478"/>
+                </a:solidFill>
+                <a:latin typeface="Calibri" pitchFamily="34" charset="0"/>
+                <a:ea typeface="Calibri" pitchFamily="34" charset="-122"/>
+                <a:cs typeface="Calibri" pitchFamily="34" charset="-120"/>
+              </a:rPr>
+              <a:t>Con due nomi: i è la posizione (si conta da 0), x l'elemento.</a:t>
+            </a:r>
+            <a:endParaRPr lang="en-US" sz="1600" dirty="0"/>
           </a:p>
         </p:txBody>
       </p:sp>

--- a/slide/slide-2-vpc.pptx
+++ b/slide/slide-2-vpc.pptx
@@ -7128,7 +7128,7 @@
                 <a:ea typeface="Calibri" pitchFamily="34" charset="-122"/>
                 <a:cs typeface="Calibri" pitchFamily="34" charset="-120"/>
               </a:rPr>
-              <a:t>Senza queste due opzioni il database e altri servizi AWS non si trovano (lezioni 5, 6, 7).</a:t>
+              <a:t>Senza queste due opzioni il database e altri servizi AWS non si trovano (lezioni 4, 6, 7).</a:t>
             </a:r>
             <a:endParaRPr lang="en-US" sz="1800" dirty="0"/>
           </a:p>
@@ -12295,7 +12295,7 @@
                 <a:ea typeface="Calibri" pitchFamily="34" charset="-122"/>
                 <a:cs typeface="Calibri" pitchFamily="34" charset="-120"/>
               </a:rPr>
-              <a:t>l'applicazione: lezione 5</a:t>
+              <a:t>l'applicazione: lezione 4</a:t>
             </a:r>
             <a:endParaRPr lang="en-US" sz="1500" dirty="0"/>
           </a:p>
